--- a/docs/kv-rdma-rw-flow.pptx
+++ b/docs/kv-rdma-rw-flow.pptx
@@ -6,6 +6,7 @@
   </p:sldMasterIdLst>
   <p:sldIdLst>
     <p:sldId id="256" r:id="rId7"/>
+    <p:sldId id="257" r:id="rId9"/>
   </p:sldIdLst>
   <p:sldSz cx="12191695" cy="6858000" type="screen4x3"/>
   <p:notesSz cx="6858000" cy="9144000"/>
@@ -502,7 +503,77 @@
           <a:lstStyle/>
           <a:p>
             <a:r>
-              <a:t>这页是交互关系，不是时序图。参与者从左到右：调用方、本端 TransferEngine、本端网卡、对端网卡、对端已注册内存。建链一次：register 内存，元数据公布 addr、length、rkey；首次通信交换 QP，建成 RC。READ：调用方提交 opcode=READ、source、target_id、target_offset、length。引擎按默认 64KB 切 slice，选网卡，ibv_post_send 的 opcode 为 IBV_WR_RDMA_READ，imm_data=0。WR 里是本地地址和 lkey、远端地址和 rkey、长度。对端网卡从注册内存读出字节送回，本端写入 source。完成队列在本端，getTransferStatus 看到全部 slice 完成后返回 COMPLETED。WRITE：opcode=WRITE，source 是要推出去的 KV。WR 为 IBV_WR_RDMA_WRITE，数据随 WR 到对端网卡，写入 dest_addr。对端 CPU 不读 TransferRequest，也没有软件层的响应报文。因此 target_rate 只能由本端引擎在 post 之前用来放行 slice。READ 控的是拉取速度，WRITE 控的是推送速度。</a:t>
+              <a:t>这一页说明 Decode 读取已有前缀 KV 的两条控制路径，都不是时序轴。PD 直连来自 vLLM MooncakeConnector。调度在 kv_transfer_params 里放 do_remote_prefill、remote_host、remote_port。Decode worker 的 receive_kv 经 ZMQ 把 MooncakeAgentMetadata 发给 Prefill：remote_hostname、remote_port、kv_caches_base_addr、block_ids、request_ids。Prefill 的 send_kv_to_decode 计算 src = 本端 layer base + local block * block_len，dst = Decode layer base + remote block * block_len，调用 batch_transfer_sync_write。数据面是 Prefill 发起的 RDMA WRITE，Decode 网卡把字节 DMA 进已注册 HBM。ZMQ 回 TRANS_DONE 后 Decode 才把该请求记入 finished_recving。save_kv_layer 不参与这次读取。KV 池路径来自 Mooncake Store。Decode 对 Master 发 GetReplicaList(key)，响应含 replicas、lease_ttl_ms。MEMORY 副本用 TransferEngine RDMA READ buffer_address。LOCAL_DISK 副本先对持有节点发 BatchGetOffloadObject，对端从 SSD 读入 ClientBuffer，响应含 batch_id、pointers、transfer_engine_addr，Decode 再 RDMA READ 这块暂存，然后 release_offload_buffer。SSD 不是 RDMA 的目标地址。两条路径的 TransferRequest 都只有 opcode、source、target_id、target_offset、length。位置在控制面已经变成地址。</a:t>
+            </a:r>
+          </a:p>
+        </p:txBody>
+      </p:sp>
+      <p:sp>
+        <p:nvSpPr>
+          <p:cNvPr id="4" name="Slide Number Placeholder 3"/>
+          <p:cNvSpPr>
+            <a:spLocks noGrp="1"/>
+          </p:cNvSpPr>
+          <p:nvPr>
+            <p:ph type="sldNum" idx="5" sz="quarter"/>
+          </p:nvPr>
+        </p:nvSpPr>
+        <p:spPr/>
+      </p:sp>
+    </p:spTree>
+  </p:cSld>
+  <p:clrMapOvr>
+    <a:masterClrMapping/>
+  </p:clrMapOvr>
+</p:notes>
+</file>
+
+<file path=ppt/notesSlides/notesSlide2.xml><?xml version="1.0" encoding="utf-8"?>
+<p:notes xmlns:a="http://schemas.openxmlformats.org/drawingml/2006/main" xmlns:p="http://schemas.openxmlformats.org/presentationml/2006/main" xmlns:r="http://schemas.openxmlformats.org/officeDocument/2006/relationships">
+  <p:cSld>
+    <p:spTree>
+      <p:nvGrpSpPr>
+        <p:cNvPr id="1" name=""/>
+        <p:cNvGrpSpPr/>
+        <p:nvPr/>
+      </p:nvGrpSpPr>
+      <p:grpSpPr>
+        <a:xfrm>
+          <a:off x="0" y="0"/>
+          <a:ext cx="0" cy="0"/>
+          <a:chOff x="0" y="0"/>
+          <a:chExt cx="0" cy="0"/>
+        </a:xfrm>
+      </p:grpSpPr>
+      <p:sp>
+        <p:nvSpPr>
+          <p:cNvPr id="2" name="Slide Image Placeholder 1"/>
+          <p:cNvSpPr>
+            <a:spLocks noGrp="1"/>
+          </p:cNvSpPr>
+          <p:nvPr>
+            <p:ph type="sldImg" idx="2"/>
+          </p:nvPr>
+        </p:nvSpPr>
+        <p:spPr/>
+      </p:sp>
+      <p:sp>
+        <p:nvSpPr>
+          <p:cNvPr id="3" name="Notes Placeholder 2"/>
+          <p:cNvSpPr>
+            <a:spLocks noGrp="1"/>
+          </p:cNvSpPr>
+          <p:nvPr>
+            <p:ph type="body" idx="3" sz="quarter"/>
+          </p:nvPr>
+        </p:nvSpPr>
+        <p:spPr/>
+        <p:txBody>
+          <a:bodyPr/>
+          <a:lstStyle/>
+          <a:p>
+            <a:r>
+              <a:t>Decode 写 KV 分默认路径和入池路径。vLLM MooncakeConnector.save_kv_layer 直接返回，不提交 TransferRequest。新 token 的 KV 留在 Decode 进程已经 registerLocalMemory 的 HBM 里，下一步 attention 本地读取。要放进 Mooncake Store 给别的请求复用时，走两阶段元数据。PutStart 在 Master 上占配额、按 AllocationStrategy 从某个 segment 分配缓冲，副本状态为 PROCESSING，把 endpoint 和 buffer_address 还给 Decode。segment 属于本机时，写入就是到 Host DDR 的本地拷贝；segment 属于别的节点时，Decode 作为发起方 post IBV_WR_RDMA_WRITE，对端网卡按 rkey 做 DMA，对端 CPU 不读请求。PutEnd 校验写者后把副本标为 COMPLETE。失败则 PutRevoke，释放缓冲。SSD 不是 TransferRequest 的一种 opcode。enable_offload 时，COMPLETE 之后由 Master 控制面排队，客户端把对象写入 MOONCAKE_OFFLOAD_FILE_STORAGE_PATH，副本类型变为 LOCAL_DISK。offload_on_evict 则拖到淘汰时才写盘。读这条副本的控制消息是 BatchGetOffloadObject，数据面仍是对暂存缓冲的 RDMA READ。</a:t>
             </a:r>
           </a:p>
         </p:txBody>
@@ -3560,7 +3631,7 @@
         <p:spPr>
           <a:xfrm>
             <a:off x="384048" y="128016"/>
-            <a:ext cx="9326880" cy="237744"/>
+            <a:ext cx="9509760" cy="219456"/>
           </a:xfrm>
           <a:prstGeom prst="rect">
             <a:avLst/>
@@ -3588,7 +3659,7 @@
                 <a:ea typeface="Microsoft YaHei"/>
                 <a:cs typeface="Microsoft YaHei"/>
               </a:rPr>
-              <a:t>TransferEngine    ·    单边 RDMA    ·    READ / WRITE</a:t>
+              <a:t>Decode KV    ·    控制消息与单边 RDMA</a:t>
             </a:r>
           </a:p>
         </p:txBody>
@@ -3602,7 +3673,7 @@
         <p:spPr>
           <a:xfrm>
             <a:off x="384048" y="347472"/>
-            <a:ext cx="11430000" cy="365760"/>
+            <a:ext cx="10424160" cy="365760"/>
           </a:xfrm>
           <a:prstGeom prst="rect">
             <a:avLst/>
@@ -3622,7 +3693,7 @@
               </a:spcAft>
             </a:pPr>
             <a:r>
-              <a:rPr sz="2600" b="1">
+              <a:rPr sz="2400" b="1">
                 <a:solidFill>
                   <a:srgbClr val="0E2A47"/>
                 </a:solidFill>
@@ -3630,7 +3701,7 @@
                 <a:ea typeface="Microsoft YaHei"/>
                 <a:cs typeface="Microsoft YaHei"/>
               </a:rPr>
-              <a:t>两次交互都由本端发起，完成也回到本端</a:t>
+              <a:t>Decode 读前缀时，控制消息只交换地址</a:t>
             </a:r>
           </a:p>
         </p:txBody>
@@ -3643,8 +3714,8 @@
         </p:nvSpPr>
         <p:spPr>
           <a:xfrm>
-            <a:off x="10424160" y="146304"/>
-            <a:ext cx="1371600" cy="219456"/>
+            <a:off x="10241280" y="146304"/>
+            <a:ext cx="1554480" cy="219456"/>
           </a:xfrm>
           <a:prstGeom prst="rect">
             <a:avLst/>
@@ -3672,7 +3743,7 @@
                 <a:ea typeface="Microsoft YaHei"/>
                 <a:cs typeface="Microsoft YaHei"/>
               </a:rPr>
-              <a:t>1  /  1</a:t>
+              <a:t>1  /  2</a:t>
             </a:r>
           </a:p>
         </p:txBody>
@@ -3757,7 +3828,7 @@
                 <a:ea typeface="Microsoft YaHei"/>
                 <a:cs typeface="Microsoft YaHei"/>
               </a:rPr>
-              <a:t>RC 事先建好    ·    slice 默认 64 KB    ·    WR 的 imm_data 为 0    ·    对端 CPU 不读 TransferRequest</a:t>
+              <a:t>注册只做一次：ram 元数据含 addr、length、rkey；rpc_meta 含 ip 和 rpc_port；首次 QP 交换 qp_num、lid、gid</a:t>
             </a:r>
           </a:p>
         </p:txBody>
@@ -3771,7 +3842,7 @@
         <p:spPr>
           <a:xfrm>
             <a:off x="384048" y="786384"/>
-            <a:ext cx="11430000" cy="365760"/>
+            <a:ext cx="11430000" cy="347472"/>
           </a:xfrm>
           <a:prstGeom prst="roundRect">
             <a:avLst/>
@@ -3814,7 +3885,7 @@
         <p:spPr>
           <a:xfrm>
             <a:off x="512064" y="786384"/>
-            <a:ext cx="11173968" cy="365760"/>
+            <a:ext cx="11173968" cy="347472"/>
           </a:xfrm>
           <a:prstGeom prst="rect">
             <a:avLst/>
@@ -3842,7 +3913,7 @@
                 <a:ea typeface="Microsoft YaHei"/>
                 <a:cs typeface="Microsoft YaHei"/>
               </a:rPr>
-              <a:t>内存注册、rkey 公布和 QP 交换只做一次。下面每次 KV 访问都走已经建好的 RC。</a:t>
+              <a:t>PD 直连由 Prefill 发起 WRITE。KV 池由 Decode 发起 READ。字节进入本端 HBM 后才开始 attention。</a:t>
             </a:r>
           </a:p>
         </p:txBody>
@@ -3856,7 +3927,7 @@
         <p:spPr>
           <a:xfrm>
             <a:off x="384048" y="1243584"/>
-            <a:ext cx="11430000" cy="292608"/>
+            <a:ext cx="5632704" cy="310896"/>
           </a:xfrm>
           <a:prstGeom prst="roundRect">
             <a:avLst/>
@@ -3899,7 +3970,7 @@
         <p:spPr>
           <a:xfrm>
             <a:off x="512064" y="1243584"/>
-            <a:ext cx="11155680" cy="292608"/>
+            <a:ext cx="5376672" cy="310896"/>
           </a:xfrm>
           <a:prstGeom prst="rect">
             <a:avLst/>
@@ -3927,7 +3998,7 @@
                 <a:ea typeface="Microsoft YaHei"/>
                 <a:cs typeface="Microsoft YaHei"/>
               </a:rPr>
-              <a:t>READ    本端把远端 KV 拉回本地缓冲</a:t>
+              <a:t>PD 直连    Prefill 把 KV 写入 Decode</a:t>
             </a:r>
           </a:p>
         </p:txBody>
@@ -3940,8 +4011,93 @@
         </p:nvSpPr>
         <p:spPr>
           <a:xfrm>
-            <a:off x="457200" y="1865376"/>
-            <a:ext cx="1700784" cy="713232"/>
+            <a:off x="6181344" y="1243584"/>
+            <a:ext cx="5632704" cy="310896"/>
+          </a:xfrm>
+          <a:prstGeom prst="roundRect">
+            <a:avLst/>
+          </a:prstGeom>
+          <a:solidFill>
+            <a:srgbClr val="0E7A76"/>
+          </a:solidFill>
+          <a:ln>
+            <a:noFill/>
+          </a:ln>
+        </p:spPr>
+        <p:style>
+          <a:lnRef idx="1">
+            <a:schemeClr val="accent1"/>
+          </a:lnRef>
+          <a:fillRef idx="3">
+            <a:schemeClr val="accent1"/>
+          </a:fillRef>
+          <a:effectRef idx="2">
+            <a:schemeClr val="accent1"/>
+          </a:effectRef>
+          <a:fontRef idx="minor">
+            <a:schemeClr val="lt1"/>
+          </a:fontRef>
+        </p:style>
+        <p:txBody>
+          <a:bodyPr rtlCol="0" anchor="ctr"/>
+          <a:lstStyle/>
+          <a:p>
+            <a:pPr algn="ctr"/>
+          </a:p>
+        </p:txBody>
+      </p:sp>
+      <p:sp>
+        <p:nvSpPr>
+          <p:cNvPr id="13" name="TextBox 12"/>
+          <p:cNvSpPr txBox="1"/>
+          <p:nvPr/>
+        </p:nvSpPr>
+        <p:spPr>
+          <a:xfrm>
+            <a:off x="6309359" y="1243584"/>
+            <a:ext cx="5376672" cy="310896"/>
+          </a:xfrm>
+          <a:prstGeom prst="rect">
+            <a:avLst/>
+          </a:prstGeom>
+          <a:noFill/>
+        </p:spPr>
+        <p:txBody>
+          <a:bodyPr wrap="square" lIns="0" rIns="0" tIns="0" bIns="0" anchor="ctr"/>
+          <a:lstStyle/>
+          <a:p>
+            <a:pPr algn="l">
+              <a:spcBef>
+                <a:spcPts val="0"/>
+              </a:spcBef>
+              <a:spcAft>
+                <a:spcPts val="0"/>
+              </a:spcAft>
+            </a:pPr>
+            <a:r>
+              <a:rPr sz="1400" b="1">
+                <a:solidFill>
+                  <a:srgbClr val="FFFFFF"/>
+                </a:solidFill>
+                <a:latin typeface="Microsoft YaHei"/>
+                <a:ea typeface="Microsoft YaHei"/>
+                <a:cs typeface="Microsoft YaHei"/>
+              </a:rPr>
+              <a:t>KV 池    Decode 自己把 KV 读回</a:t>
+            </a:r>
+          </a:p>
+        </p:txBody>
+      </p:sp>
+      <p:sp>
+        <p:nvSpPr>
+          <p:cNvPr id="14" name="Rounded Rectangle 13"/>
+          <p:cNvSpPr/>
+          <p:nvPr/>
+        </p:nvSpPr>
+        <p:spPr>
+          <a:xfrm>
+            <a:off x="384048" y="1627632"/>
+            <a:ext cx="5632704" cy="1060704"/>
           </a:xfrm>
           <a:prstGeom prst="roundRect">
             <a:avLst/>
@@ -3979,14 +4135,57 @@
       </p:sp>
       <p:sp>
         <p:nvSpPr>
-          <p:cNvPr id="13" name="TextBox 12"/>
+          <p:cNvPr id="15" name="Rectangle 14"/>
+          <p:cNvSpPr/>
+          <p:nvPr/>
+        </p:nvSpPr>
+        <p:spPr>
+          <a:xfrm>
+            <a:off x="384048" y="1719072"/>
+            <a:ext cx="64008" cy="877824"/>
+          </a:xfrm>
+          <a:prstGeom prst="rect">
+            <a:avLst/>
+          </a:prstGeom>
+          <a:solidFill>
+            <a:srgbClr val="0E2A47"/>
+          </a:solidFill>
+          <a:ln>
+            <a:noFill/>
+          </a:ln>
+        </p:spPr>
+        <p:style>
+          <a:lnRef idx="1">
+            <a:schemeClr val="accent1"/>
+          </a:lnRef>
+          <a:fillRef idx="3">
+            <a:schemeClr val="accent1"/>
+          </a:fillRef>
+          <a:effectRef idx="2">
+            <a:schemeClr val="accent1"/>
+          </a:effectRef>
+          <a:fontRef idx="minor">
+            <a:schemeClr val="lt1"/>
+          </a:fontRef>
+        </p:style>
+        <p:txBody>
+          <a:bodyPr rtlCol="0" anchor="ctr"/>
+          <a:lstStyle/>
+          <a:p>
+            <a:pPr algn="ctr"/>
+          </a:p>
+        </p:txBody>
+      </p:sp>
+      <p:sp>
+        <p:nvSpPr>
+          <p:cNvPr id="16" name="TextBox 15"/>
           <p:cNvSpPr txBox="1"/>
           <p:nvPr/>
         </p:nvSpPr>
         <p:spPr>
           <a:xfrm>
-            <a:off x="530352" y="1938528"/>
-            <a:ext cx="1554480" cy="292608"/>
+            <a:off x="548640" y="1682496"/>
+            <a:ext cx="566928" cy="237744"/>
           </a:xfrm>
           <a:prstGeom prst="rect">
             <a:avLst/>
@@ -3997,7 +4196,7 @@
           <a:bodyPr wrap="square" lIns="0" rIns="0" tIns="0" bIns="0" anchor="ctr"/>
           <a:lstStyle/>
           <a:p>
-            <a:pPr algn="ctr">
+            <a:pPr algn="l">
               <a:spcBef>
                 <a:spcPts val="0"/>
               </a:spcBef>
@@ -4006,7 +4205,7 @@
               </a:spcAft>
             </a:pPr>
             <a:r>
-              <a:rPr sz="1400" b="1">
+              <a:rPr sz="1200" b="1">
                 <a:solidFill>
                   <a:srgbClr val="0E2A47"/>
                 </a:solidFill>
@@ -4014,21 +4213,21 @@
                 <a:ea typeface="Microsoft YaHei"/>
                 <a:cs typeface="Microsoft YaHei"/>
               </a:rPr>
-              <a:t>调用方</a:t>
-            </a:r>
-          </a:p>
-        </p:txBody>
-      </p:sp>
-      <p:sp>
-        <p:nvSpPr>
-          <p:cNvPr id="14" name="TextBox 13"/>
+              <a:t>控制</a:t>
+            </a:r>
+          </a:p>
+        </p:txBody>
+      </p:sp>
+      <p:sp>
+        <p:nvSpPr>
+          <p:cNvPr id="17" name="TextBox 16"/>
           <p:cNvSpPr txBox="1"/>
           <p:nvPr/>
         </p:nvSpPr>
         <p:spPr>
           <a:xfrm>
-            <a:off x="530352" y="2231136"/>
-            <a:ext cx="1554480" cy="274320"/>
+            <a:off x="1133856" y="1673352"/>
+            <a:ext cx="4754880" cy="256032"/>
           </a:xfrm>
           <a:prstGeom prst="rect">
             <a:avLst/>
@@ -4039,7 +4238,1819 @@
           <a:bodyPr wrap="square" lIns="0" rIns="0" tIns="0" bIns="0" anchor="ctr"/>
           <a:lstStyle/>
           <a:p>
-            <a:pPr algn="ctr">
+            <a:pPr algn="l">
+              <a:spcBef>
+                <a:spcPts val="0"/>
+              </a:spcBef>
+              <a:spcAft>
+                <a:spcPts val="0"/>
+              </a:spcAft>
+            </a:pPr>
+            <a:r>
+              <a:rPr sz="1300" b="1">
+                <a:solidFill>
+                  <a:srgbClr val="1C242E"/>
+                </a:solidFill>
+                <a:latin typeface="Microsoft YaHei"/>
+                <a:ea typeface="Microsoft YaHei"/>
+                <a:cs typeface="Microsoft YaHei"/>
+              </a:rPr>
+              <a:t>调度  →  Decode</a:t>
+            </a:r>
+          </a:p>
+        </p:txBody>
+      </p:sp>
+      <p:sp>
+        <p:nvSpPr>
+          <p:cNvPr id="18" name="TextBox 17"/>
+          <p:cNvSpPr txBox="1"/>
+          <p:nvPr/>
+        </p:nvSpPr>
+        <p:spPr>
+          <a:xfrm>
+            <a:off x="548640" y="1956816"/>
+            <a:ext cx="5340096" cy="676656"/>
+          </a:xfrm>
+          <a:prstGeom prst="rect">
+            <a:avLst/>
+          </a:prstGeom>
+          <a:noFill/>
+        </p:spPr>
+        <p:txBody>
+          <a:bodyPr wrap="square" lIns="0" rIns="0" tIns="0" bIns="0" anchor="t"/>
+          <a:lstStyle/>
+          <a:p>
+            <a:pPr algn="l">
+              <a:spcBef>
+                <a:spcPts val="0"/>
+              </a:spcBef>
+              <a:spcAft>
+                <a:spcPts val="0"/>
+              </a:spcAft>
+            </a:pPr>
+            <a:r>
+              <a:rPr sz="1200" b="0">
+                <a:solidFill>
+                  <a:srgbClr val="1C242E"/>
+                </a:solidFill>
+                <a:latin typeface="Microsoft YaHei"/>
+                <a:ea typeface="Microsoft YaHei"/>
+                <a:cs typeface="Microsoft YaHei"/>
+              </a:rPr>
+              <a:t>带上 do_remote_prefill、remote_host、remote_port，并分配本地 block。</a:t>
+            </a:r>
+          </a:p>
+        </p:txBody>
+      </p:sp>
+      <p:sp>
+        <p:nvSpPr>
+          <p:cNvPr id="19" name="Rounded Rectangle 18"/>
+          <p:cNvSpPr/>
+          <p:nvPr/>
+        </p:nvSpPr>
+        <p:spPr>
+          <a:xfrm>
+            <a:off x="384048" y="2761488"/>
+            <a:ext cx="5632704" cy="1060704"/>
+          </a:xfrm>
+          <a:prstGeom prst="roundRect">
+            <a:avLst/>
+          </a:prstGeom>
+          <a:solidFill>
+            <a:srgbClr val="F4F7FA"/>
+          </a:solidFill>
+          <a:ln w="12700">
+            <a:solidFill>
+              <a:srgbClr val="D6DCE2"/>
+            </a:solidFill>
+          </a:ln>
+        </p:spPr>
+        <p:style>
+          <a:lnRef idx="1">
+            <a:schemeClr val="accent1"/>
+          </a:lnRef>
+          <a:fillRef idx="3">
+            <a:schemeClr val="accent1"/>
+          </a:fillRef>
+          <a:effectRef idx="2">
+            <a:schemeClr val="accent1"/>
+          </a:effectRef>
+          <a:fontRef idx="minor">
+            <a:schemeClr val="lt1"/>
+          </a:fontRef>
+        </p:style>
+        <p:txBody>
+          <a:bodyPr rtlCol="0" anchor="ctr"/>
+          <a:lstStyle/>
+          <a:p>
+            <a:pPr algn="ctr"/>
+          </a:p>
+        </p:txBody>
+      </p:sp>
+      <p:sp>
+        <p:nvSpPr>
+          <p:cNvPr id="20" name="Rectangle 19"/>
+          <p:cNvSpPr/>
+          <p:nvPr/>
+        </p:nvSpPr>
+        <p:spPr>
+          <a:xfrm>
+            <a:off x="384048" y="2852928"/>
+            <a:ext cx="64008" cy="877824"/>
+          </a:xfrm>
+          <a:prstGeom prst="rect">
+            <a:avLst/>
+          </a:prstGeom>
+          <a:solidFill>
+            <a:srgbClr val="0E2A47"/>
+          </a:solidFill>
+          <a:ln>
+            <a:noFill/>
+          </a:ln>
+        </p:spPr>
+        <p:style>
+          <a:lnRef idx="1">
+            <a:schemeClr val="accent1"/>
+          </a:lnRef>
+          <a:fillRef idx="3">
+            <a:schemeClr val="accent1"/>
+          </a:fillRef>
+          <a:effectRef idx="2">
+            <a:schemeClr val="accent1"/>
+          </a:effectRef>
+          <a:fontRef idx="minor">
+            <a:schemeClr val="lt1"/>
+          </a:fontRef>
+        </p:style>
+        <p:txBody>
+          <a:bodyPr rtlCol="0" anchor="ctr"/>
+          <a:lstStyle/>
+          <a:p>
+            <a:pPr algn="ctr"/>
+          </a:p>
+        </p:txBody>
+      </p:sp>
+      <p:sp>
+        <p:nvSpPr>
+          <p:cNvPr id="21" name="TextBox 20"/>
+          <p:cNvSpPr txBox="1"/>
+          <p:nvPr/>
+        </p:nvSpPr>
+        <p:spPr>
+          <a:xfrm>
+            <a:off x="548640" y="2816352"/>
+            <a:ext cx="566928" cy="237744"/>
+          </a:xfrm>
+          <a:prstGeom prst="rect">
+            <a:avLst/>
+          </a:prstGeom>
+          <a:noFill/>
+        </p:spPr>
+        <p:txBody>
+          <a:bodyPr wrap="square" lIns="0" rIns="0" tIns="0" bIns="0" anchor="ctr"/>
+          <a:lstStyle/>
+          <a:p>
+            <a:pPr algn="l">
+              <a:spcBef>
+                <a:spcPts val="0"/>
+              </a:spcBef>
+              <a:spcAft>
+                <a:spcPts val="0"/>
+              </a:spcAft>
+            </a:pPr>
+            <a:r>
+              <a:rPr sz="1200" b="1">
+                <a:solidFill>
+                  <a:srgbClr val="0E2A47"/>
+                </a:solidFill>
+                <a:latin typeface="Microsoft YaHei"/>
+                <a:ea typeface="Microsoft YaHei"/>
+                <a:cs typeface="Microsoft YaHei"/>
+              </a:rPr>
+              <a:t>控制</a:t>
+            </a:r>
+          </a:p>
+        </p:txBody>
+      </p:sp>
+      <p:sp>
+        <p:nvSpPr>
+          <p:cNvPr id="22" name="TextBox 21"/>
+          <p:cNvSpPr txBox="1"/>
+          <p:nvPr/>
+        </p:nvSpPr>
+        <p:spPr>
+          <a:xfrm>
+            <a:off x="1133856" y="2807208"/>
+            <a:ext cx="4754880" cy="256032"/>
+          </a:xfrm>
+          <a:prstGeom prst="rect">
+            <a:avLst/>
+          </a:prstGeom>
+          <a:noFill/>
+        </p:spPr>
+        <p:txBody>
+          <a:bodyPr wrap="square" lIns="0" rIns="0" tIns="0" bIns="0" anchor="ctr"/>
+          <a:lstStyle/>
+          <a:p>
+            <a:pPr algn="l">
+              <a:spcBef>
+                <a:spcPts val="0"/>
+              </a:spcBef>
+              <a:spcAft>
+                <a:spcPts val="0"/>
+              </a:spcAft>
+            </a:pPr>
+            <a:r>
+              <a:rPr sz="1300" b="1">
+                <a:solidFill>
+                  <a:srgbClr val="1C242E"/>
+                </a:solidFill>
+                <a:latin typeface="Microsoft YaHei"/>
+                <a:ea typeface="Microsoft YaHei"/>
+                <a:cs typeface="Microsoft YaHei"/>
+              </a:rPr>
+              <a:t>Decode  →  Prefill，ZMQ</a:t>
+            </a:r>
+          </a:p>
+        </p:txBody>
+      </p:sp>
+      <p:sp>
+        <p:nvSpPr>
+          <p:cNvPr id="23" name="TextBox 22"/>
+          <p:cNvSpPr txBox="1"/>
+          <p:nvPr/>
+        </p:nvSpPr>
+        <p:spPr>
+          <a:xfrm>
+            <a:off x="548640" y="3090672"/>
+            <a:ext cx="5340096" cy="676656"/>
+          </a:xfrm>
+          <a:prstGeom prst="rect">
+            <a:avLst/>
+          </a:prstGeom>
+          <a:noFill/>
+        </p:spPr>
+        <p:txBody>
+          <a:bodyPr wrap="square" lIns="0" rIns="0" tIns="0" bIns="0" anchor="t"/>
+          <a:lstStyle/>
+          <a:p>
+            <a:pPr algn="l">
+              <a:spcBef>
+                <a:spcPts val="0"/>
+              </a:spcBef>
+              <a:spcAft>
+                <a:spcPts val="0"/>
+              </a:spcAft>
+            </a:pPr>
+            <a:r>
+              <a:rPr sz="1200" b="0">
+                <a:solidFill>
+                  <a:srgbClr val="1C242E"/>
+                </a:solidFill>
+                <a:latin typeface="Microsoft YaHei"/>
+                <a:ea typeface="Microsoft YaHei"/>
+                <a:cs typeface="Microsoft YaHei"/>
+              </a:rPr>
+              <a:t>送出 hostname、rpc_port、各层 kv base、block id。这是控制消息，不是 KV 本体。</a:t>
+            </a:r>
+          </a:p>
+        </p:txBody>
+      </p:sp>
+      <p:sp>
+        <p:nvSpPr>
+          <p:cNvPr id="24" name="Rounded Rectangle 23"/>
+          <p:cNvSpPr/>
+          <p:nvPr/>
+        </p:nvSpPr>
+        <p:spPr>
+          <a:xfrm>
+            <a:off x="384048" y="3895344"/>
+            <a:ext cx="5632704" cy="1060704"/>
+          </a:xfrm>
+          <a:prstGeom prst="roundRect">
+            <a:avLst/>
+          </a:prstGeom>
+          <a:solidFill>
+            <a:srgbClr val="E7F3F2"/>
+          </a:solidFill>
+          <a:ln w="12700">
+            <a:solidFill>
+              <a:srgbClr val="D6DCE2"/>
+            </a:solidFill>
+          </a:ln>
+        </p:spPr>
+        <p:style>
+          <a:lnRef idx="1">
+            <a:schemeClr val="accent1"/>
+          </a:lnRef>
+          <a:fillRef idx="3">
+            <a:schemeClr val="accent1"/>
+          </a:fillRef>
+          <a:effectRef idx="2">
+            <a:schemeClr val="accent1"/>
+          </a:effectRef>
+          <a:fontRef idx="minor">
+            <a:schemeClr val="lt1"/>
+          </a:fontRef>
+        </p:style>
+        <p:txBody>
+          <a:bodyPr rtlCol="0" anchor="ctr"/>
+          <a:lstStyle/>
+          <a:p>
+            <a:pPr algn="ctr"/>
+          </a:p>
+        </p:txBody>
+      </p:sp>
+      <p:sp>
+        <p:nvSpPr>
+          <p:cNvPr id="25" name="Rectangle 24"/>
+          <p:cNvSpPr/>
+          <p:nvPr/>
+        </p:nvSpPr>
+        <p:spPr>
+          <a:xfrm>
+            <a:off x="384048" y="3986783"/>
+            <a:ext cx="64008" cy="877824"/>
+          </a:xfrm>
+          <a:prstGeom prst="rect">
+            <a:avLst/>
+          </a:prstGeom>
+          <a:solidFill>
+            <a:srgbClr val="0E7A76"/>
+          </a:solidFill>
+          <a:ln>
+            <a:noFill/>
+          </a:ln>
+        </p:spPr>
+        <p:style>
+          <a:lnRef idx="1">
+            <a:schemeClr val="accent1"/>
+          </a:lnRef>
+          <a:fillRef idx="3">
+            <a:schemeClr val="accent1"/>
+          </a:fillRef>
+          <a:effectRef idx="2">
+            <a:schemeClr val="accent1"/>
+          </a:effectRef>
+          <a:fontRef idx="minor">
+            <a:schemeClr val="lt1"/>
+          </a:fontRef>
+        </p:style>
+        <p:txBody>
+          <a:bodyPr rtlCol="0" anchor="ctr"/>
+          <a:lstStyle/>
+          <a:p>
+            <a:pPr algn="ctr"/>
+          </a:p>
+        </p:txBody>
+      </p:sp>
+      <p:sp>
+        <p:nvSpPr>
+          <p:cNvPr id="26" name="TextBox 25"/>
+          <p:cNvSpPr txBox="1"/>
+          <p:nvPr/>
+        </p:nvSpPr>
+        <p:spPr>
+          <a:xfrm>
+            <a:off x="548640" y="3950207"/>
+            <a:ext cx="566928" cy="237744"/>
+          </a:xfrm>
+          <a:prstGeom prst="rect">
+            <a:avLst/>
+          </a:prstGeom>
+          <a:noFill/>
+        </p:spPr>
+        <p:txBody>
+          <a:bodyPr wrap="square" lIns="0" rIns="0" tIns="0" bIns="0" anchor="ctr"/>
+          <a:lstStyle/>
+          <a:p>
+            <a:pPr algn="l">
+              <a:spcBef>
+                <a:spcPts val="0"/>
+              </a:spcBef>
+              <a:spcAft>
+                <a:spcPts val="0"/>
+              </a:spcAft>
+            </a:pPr>
+            <a:r>
+              <a:rPr sz="1200" b="1">
+                <a:solidFill>
+                  <a:srgbClr val="0E7A76"/>
+                </a:solidFill>
+                <a:latin typeface="Microsoft YaHei"/>
+                <a:ea typeface="Microsoft YaHei"/>
+                <a:cs typeface="Microsoft YaHei"/>
+              </a:rPr>
+              <a:t>数据</a:t>
+            </a:r>
+          </a:p>
+        </p:txBody>
+      </p:sp>
+      <p:sp>
+        <p:nvSpPr>
+          <p:cNvPr id="27" name="TextBox 26"/>
+          <p:cNvSpPr txBox="1"/>
+          <p:nvPr/>
+        </p:nvSpPr>
+        <p:spPr>
+          <a:xfrm>
+            <a:off x="1133856" y="3941063"/>
+            <a:ext cx="4754880" cy="256032"/>
+          </a:xfrm>
+          <a:prstGeom prst="rect">
+            <a:avLst/>
+          </a:prstGeom>
+          <a:noFill/>
+        </p:spPr>
+        <p:txBody>
+          <a:bodyPr wrap="square" lIns="0" rIns="0" tIns="0" bIns="0" anchor="ctr"/>
+          <a:lstStyle/>
+          <a:p>
+            <a:pPr algn="l">
+              <a:spcBef>
+                <a:spcPts val="0"/>
+              </a:spcBef>
+              <a:spcAft>
+                <a:spcPts val="0"/>
+              </a:spcAft>
+            </a:pPr>
+            <a:r>
+              <a:rPr sz="1300" b="1">
+                <a:solidFill>
+                  <a:srgbClr val="1C242E"/>
+                </a:solidFill>
+                <a:latin typeface="Microsoft YaHei"/>
+                <a:ea typeface="Microsoft YaHei"/>
+                <a:cs typeface="Microsoft YaHei"/>
+              </a:rPr>
+              <a:t>Prefill  →  Decode HBM</a:t>
+            </a:r>
+          </a:p>
+        </p:txBody>
+      </p:sp>
+      <p:sp>
+        <p:nvSpPr>
+          <p:cNvPr id="28" name="TextBox 27"/>
+          <p:cNvSpPr txBox="1"/>
+          <p:nvPr/>
+        </p:nvSpPr>
+        <p:spPr>
+          <a:xfrm>
+            <a:off x="548640" y="4224528"/>
+            <a:ext cx="5340096" cy="676656"/>
+          </a:xfrm>
+          <a:prstGeom prst="rect">
+            <a:avLst/>
+          </a:prstGeom>
+          <a:noFill/>
+        </p:spPr>
+        <p:txBody>
+          <a:bodyPr wrap="square" lIns="0" rIns="0" tIns="0" bIns="0" anchor="t"/>
+          <a:lstStyle/>
+          <a:p>
+            <a:pPr algn="l">
+              <a:spcBef>
+                <a:spcPts val="0"/>
+              </a:spcBef>
+              <a:spcAft>
+                <a:spcPts val="0"/>
+              </a:spcAft>
+            </a:pPr>
+            <a:r>
+              <a:rPr sz="1200" b="0">
+                <a:solidFill>
+                  <a:srgbClr val="1C242E"/>
+                </a:solidFill>
+                <a:latin typeface="Microsoft YaHei"/>
+                <a:ea typeface="Microsoft YaHei"/>
+                <a:cs typeface="Microsoft YaHei"/>
+              </a:rPr>
+              <a:t>RDMA WRITE。源是 Prefill 的 block，目的地址是 Decode base 加 block 乘 block_len。</a:t>
+            </a:r>
+          </a:p>
+        </p:txBody>
+      </p:sp>
+      <p:sp>
+        <p:nvSpPr>
+          <p:cNvPr id="29" name="Rounded Rectangle 28"/>
+          <p:cNvSpPr/>
+          <p:nvPr/>
+        </p:nvSpPr>
+        <p:spPr>
+          <a:xfrm>
+            <a:off x="384048" y="5029200"/>
+            <a:ext cx="5632704" cy="1060704"/>
+          </a:xfrm>
+          <a:prstGeom prst="roundRect">
+            <a:avLst/>
+          </a:prstGeom>
+          <a:solidFill>
+            <a:srgbClr val="F4F7FA"/>
+          </a:solidFill>
+          <a:ln w="12700">
+            <a:solidFill>
+              <a:srgbClr val="D6DCE2"/>
+            </a:solidFill>
+          </a:ln>
+        </p:spPr>
+        <p:style>
+          <a:lnRef idx="1">
+            <a:schemeClr val="accent1"/>
+          </a:lnRef>
+          <a:fillRef idx="3">
+            <a:schemeClr val="accent1"/>
+          </a:fillRef>
+          <a:effectRef idx="2">
+            <a:schemeClr val="accent1"/>
+          </a:effectRef>
+          <a:fontRef idx="minor">
+            <a:schemeClr val="lt1"/>
+          </a:fontRef>
+        </p:style>
+        <p:txBody>
+          <a:bodyPr rtlCol="0" anchor="ctr"/>
+          <a:lstStyle/>
+          <a:p>
+            <a:pPr algn="ctr"/>
+          </a:p>
+        </p:txBody>
+      </p:sp>
+      <p:sp>
+        <p:nvSpPr>
+          <p:cNvPr id="30" name="Rectangle 29"/>
+          <p:cNvSpPr/>
+          <p:nvPr/>
+        </p:nvSpPr>
+        <p:spPr>
+          <a:xfrm>
+            <a:off x="384048" y="5120640"/>
+            <a:ext cx="64008" cy="877824"/>
+          </a:xfrm>
+          <a:prstGeom prst="rect">
+            <a:avLst/>
+          </a:prstGeom>
+          <a:solidFill>
+            <a:srgbClr val="0E2A47"/>
+          </a:solidFill>
+          <a:ln>
+            <a:noFill/>
+          </a:ln>
+        </p:spPr>
+        <p:style>
+          <a:lnRef idx="1">
+            <a:schemeClr val="accent1"/>
+          </a:lnRef>
+          <a:fillRef idx="3">
+            <a:schemeClr val="accent1"/>
+          </a:fillRef>
+          <a:effectRef idx="2">
+            <a:schemeClr val="accent1"/>
+          </a:effectRef>
+          <a:fontRef idx="minor">
+            <a:schemeClr val="lt1"/>
+          </a:fontRef>
+        </p:style>
+        <p:txBody>
+          <a:bodyPr rtlCol="0" anchor="ctr"/>
+          <a:lstStyle/>
+          <a:p>
+            <a:pPr algn="ctr"/>
+          </a:p>
+        </p:txBody>
+      </p:sp>
+      <p:sp>
+        <p:nvSpPr>
+          <p:cNvPr id="31" name="TextBox 30"/>
+          <p:cNvSpPr txBox="1"/>
+          <p:nvPr/>
+        </p:nvSpPr>
+        <p:spPr>
+          <a:xfrm>
+            <a:off x="548640" y="5084064"/>
+            <a:ext cx="566928" cy="237744"/>
+          </a:xfrm>
+          <a:prstGeom prst="rect">
+            <a:avLst/>
+          </a:prstGeom>
+          <a:noFill/>
+        </p:spPr>
+        <p:txBody>
+          <a:bodyPr wrap="square" lIns="0" rIns="0" tIns="0" bIns="0" anchor="ctr"/>
+          <a:lstStyle/>
+          <a:p>
+            <a:pPr algn="l">
+              <a:spcBef>
+                <a:spcPts val="0"/>
+              </a:spcBef>
+              <a:spcAft>
+                <a:spcPts val="0"/>
+              </a:spcAft>
+            </a:pPr>
+            <a:r>
+              <a:rPr sz="1200" b="1">
+                <a:solidFill>
+                  <a:srgbClr val="0E2A47"/>
+                </a:solidFill>
+                <a:latin typeface="Microsoft YaHei"/>
+                <a:ea typeface="Microsoft YaHei"/>
+                <a:cs typeface="Microsoft YaHei"/>
+              </a:rPr>
+              <a:t>控制</a:t>
+            </a:r>
+          </a:p>
+        </p:txBody>
+      </p:sp>
+      <p:sp>
+        <p:nvSpPr>
+          <p:cNvPr id="32" name="TextBox 31"/>
+          <p:cNvSpPr txBox="1"/>
+          <p:nvPr/>
+        </p:nvSpPr>
+        <p:spPr>
+          <a:xfrm>
+            <a:off x="1133856" y="5074920"/>
+            <a:ext cx="4754880" cy="256032"/>
+          </a:xfrm>
+          <a:prstGeom prst="rect">
+            <a:avLst/>
+          </a:prstGeom>
+          <a:noFill/>
+        </p:spPr>
+        <p:txBody>
+          <a:bodyPr wrap="square" lIns="0" rIns="0" tIns="0" bIns="0" anchor="ctr"/>
+          <a:lstStyle/>
+          <a:p>
+            <a:pPr algn="l">
+              <a:spcBef>
+                <a:spcPts val="0"/>
+              </a:spcBef>
+              <a:spcAft>
+                <a:spcPts val="0"/>
+              </a:spcAft>
+            </a:pPr>
+            <a:r>
+              <a:rPr sz="1300" b="1">
+                <a:solidFill>
+                  <a:srgbClr val="1C242E"/>
+                </a:solidFill>
+                <a:latin typeface="Microsoft YaHei"/>
+                <a:ea typeface="Microsoft YaHei"/>
+                <a:cs typeface="Microsoft YaHei"/>
+              </a:rPr>
+              <a:t>Prefill  →  Decode，ZMQ</a:t>
+            </a:r>
+          </a:p>
+        </p:txBody>
+      </p:sp>
+      <p:sp>
+        <p:nvSpPr>
+          <p:cNvPr id="33" name="TextBox 32"/>
+          <p:cNvSpPr txBox="1"/>
+          <p:nvPr/>
+        </p:nvSpPr>
+        <p:spPr>
+          <a:xfrm>
+            <a:off x="548640" y="5358384"/>
+            <a:ext cx="5340096" cy="676656"/>
+          </a:xfrm>
+          <a:prstGeom prst="rect">
+            <a:avLst/>
+          </a:prstGeom>
+          <a:noFill/>
+        </p:spPr>
+        <p:txBody>
+          <a:bodyPr wrap="square" lIns="0" rIns="0" tIns="0" bIns="0" anchor="t"/>
+          <a:lstStyle/>
+          <a:p>
+            <a:pPr algn="l">
+              <a:spcBef>
+                <a:spcPts val="0"/>
+              </a:spcBef>
+              <a:spcAft>
+                <a:spcPts val="0"/>
+              </a:spcAft>
+            </a:pPr>
+            <a:r>
+              <a:rPr sz="1200" b="0">
+                <a:solidFill>
+                  <a:srgbClr val="1C242E"/>
+                </a:solidFill>
+                <a:latin typeface="Microsoft YaHei"/>
+                <a:ea typeface="Microsoft YaHei"/>
+                <a:cs typeface="Microsoft YaHei"/>
+              </a:rPr>
+              <a:t>返回 TRANS_DONE。Decode 收到后才 forward。失败则是 TRANS_ERROR。</a:t>
+            </a:r>
+          </a:p>
+        </p:txBody>
+      </p:sp>
+      <p:sp>
+        <p:nvSpPr>
+          <p:cNvPr id="34" name="Rounded Rectangle 33"/>
+          <p:cNvSpPr/>
+          <p:nvPr/>
+        </p:nvSpPr>
+        <p:spPr>
+          <a:xfrm>
+            <a:off x="6181344" y="1627632"/>
+            <a:ext cx="5632704" cy="1060704"/>
+          </a:xfrm>
+          <a:prstGeom prst="roundRect">
+            <a:avLst/>
+          </a:prstGeom>
+          <a:solidFill>
+            <a:srgbClr val="F4F7FA"/>
+          </a:solidFill>
+          <a:ln w="12700">
+            <a:solidFill>
+              <a:srgbClr val="D6DCE2"/>
+            </a:solidFill>
+          </a:ln>
+        </p:spPr>
+        <p:style>
+          <a:lnRef idx="1">
+            <a:schemeClr val="accent1"/>
+          </a:lnRef>
+          <a:fillRef idx="3">
+            <a:schemeClr val="accent1"/>
+          </a:fillRef>
+          <a:effectRef idx="2">
+            <a:schemeClr val="accent1"/>
+          </a:effectRef>
+          <a:fontRef idx="minor">
+            <a:schemeClr val="lt1"/>
+          </a:fontRef>
+        </p:style>
+        <p:txBody>
+          <a:bodyPr rtlCol="0" anchor="ctr"/>
+          <a:lstStyle/>
+          <a:p>
+            <a:pPr algn="ctr"/>
+          </a:p>
+        </p:txBody>
+      </p:sp>
+      <p:sp>
+        <p:nvSpPr>
+          <p:cNvPr id="35" name="Rectangle 34"/>
+          <p:cNvSpPr/>
+          <p:nvPr/>
+        </p:nvSpPr>
+        <p:spPr>
+          <a:xfrm>
+            <a:off x="6181344" y="1719072"/>
+            <a:ext cx="64008" cy="877824"/>
+          </a:xfrm>
+          <a:prstGeom prst="rect">
+            <a:avLst/>
+          </a:prstGeom>
+          <a:solidFill>
+            <a:srgbClr val="0E2A47"/>
+          </a:solidFill>
+          <a:ln>
+            <a:noFill/>
+          </a:ln>
+        </p:spPr>
+        <p:style>
+          <a:lnRef idx="1">
+            <a:schemeClr val="accent1"/>
+          </a:lnRef>
+          <a:fillRef idx="3">
+            <a:schemeClr val="accent1"/>
+          </a:fillRef>
+          <a:effectRef idx="2">
+            <a:schemeClr val="accent1"/>
+          </a:effectRef>
+          <a:fontRef idx="minor">
+            <a:schemeClr val="lt1"/>
+          </a:fontRef>
+        </p:style>
+        <p:txBody>
+          <a:bodyPr rtlCol="0" anchor="ctr"/>
+          <a:lstStyle/>
+          <a:p>
+            <a:pPr algn="ctr"/>
+          </a:p>
+        </p:txBody>
+      </p:sp>
+      <p:sp>
+        <p:nvSpPr>
+          <p:cNvPr id="36" name="TextBox 35"/>
+          <p:cNvSpPr txBox="1"/>
+          <p:nvPr/>
+        </p:nvSpPr>
+        <p:spPr>
+          <a:xfrm>
+            <a:off x="6345936" y="1682496"/>
+            <a:ext cx="566928" cy="237744"/>
+          </a:xfrm>
+          <a:prstGeom prst="rect">
+            <a:avLst/>
+          </a:prstGeom>
+          <a:noFill/>
+        </p:spPr>
+        <p:txBody>
+          <a:bodyPr wrap="square" lIns="0" rIns="0" tIns="0" bIns="0" anchor="ctr"/>
+          <a:lstStyle/>
+          <a:p>
+            <a:pPr algn="l">
+              <a:spcBef>
+                <a:spcPts val="0"/>
+              </a:spcBef>
+              <a:spcAft>
+                <a:spcPts val="0"/>
+              </a:spcAft>
+            </a:pPr>
+            <a:r>
+              <a:rPr sz="1200" b="1">
+                <a:solidFill>
+                  <a:srgbClr val="0E2A47"/>
+                </a:solidFill>
+                <a:latin typeface="Microsoft YaHei"/>
+                <a:ea typeface="Microsoft YaHei"/>
+                <a:cs typeface="Microsoft YaHei"/>
+              </a:rPr>
+              <a:t>控制</a:t>
+            </a:r>
+          </a:p>
+        </p:txBody>
+      </p:sp>
+      <p:sp>
+        <p:nvSpPr>
+          <p:cNvPr id="37" name="TextBox 36"/>
+          <p:cNvSpPr txBox="1"/>
+          <p:nvPr/>
+        </p:nvSpPr>
+        <p:spPr>
+          <a:xfrm>
+            <a:off x="6931152" y="1673352"/>
+            <a:ext cx="4754880" cy="256032"/>
+          </a:xfrm>
+          <a:prstGeom prst="rect">
+            <a:avLst/>
+          </a:prstGeom>
+          <a:noFill/>
+        </p:spPr>
+        <p:txBody>
+          <a:bodyPr wrap="square" lIns="0" rIns="0" tIns="0" bIns="0" anchor="ctr"/>
+          <a:lstStyle/>
+          <a:p>
+            <a:pPr algn="l">
+              <a:spcBef>
+                <a:spcPts val="0"/>
+              </a:spcBef>
+              <a:spcAft>
+                <a:spcPts val="0"/>
+              </a:spcAft>
+            </a:pPr>
+            <a:r>
+              <a:rPr sz="1300" b="1">
+                <a:solidFill>
+                  <a:srgbClr val="1C242E"/>
+                </a:solidFill>
+                <a:latin typeface="Microsoft YaHei"/>
+                <a:ea typeface="Microsoft YaHei"/>
+                <a:cs typeface="Microsoft YaHei"/>
+              </a:rPr>
+              <a:t>Decode  →  Master</a:t>
+            </a:r>
+          </a:p>
+        </p:txBody>
+      </p:sp>
+      <p:sp>
+        <p:nvSpPr>
+          <p:cNvPr id="38" name="TextBox 37"/>
+          <p:cNvSpPr txBox="1"/>
+          <p:nvPr/>
+        </p:nvSpPr>
+        <p:spPr>
+          <a:xfrm>
+            <a:off x="6345936" y="1956816"/>
+            <a:ext cx="5340096" cy="676656"/>
+          </a:xfrm>
+          <a:prstGeom prst="rect">
+            <a:avLst/>
+          </a:prstGeom>
+          <a:noFill/>
+        </p:spPr>
+        <p:txBody>
+          <a:bodyPr wrap="square" lIns="0" rIns="0" tIns="0" bIns="0" anchor="t"/>
+          <a:lstStyle/>
+          <a:p>
+            <a:pPr algn="l">
+              <a:spcBef>
+                <a:spcPts val="0"/>
+              </a:spcBef>
+              <a:spcAft>
+                <a:spcPts val="0"/>
+              </a:spcAft>
+            </a:pPr>
+            <a:r>
+              <a:rPr sz="1200" b="0">
+                <a:solidFill>
+                  <a:srgbClr val="1C242E"/>
+                </a:solidFill>
+                <a:latin typeface="Microsoft YaHei"/>
+                <a:ea typeface="Microsoft YaHei"/>
+                <a:cs typeface="Microsoft YaHei"/>
+              </a:rPr>
+              <a:t>GetReplicaList(block key)。Master 给出可读副本，并发放读租约。</a:t>
+            </a:r>
+          </a:p>
+        </p:txBody>
+      </p:sp>
+      <p:sp>
+        <p:nvSpPr>
+          <p:cNvPr id="39" name="Rounded Rectangle 38"/>
+          <p:cNvSpPr/>
+          <p:nvPr/>
+        </p:nvSpPr>
+        <p:spPr>
+          <a:xfrm>
+            <a:off x="6181344" y="2761488"/>
+            <a:ext cx="5632704" cy="1060704"/>
+          </a:xfrm>
+          <a:prstGeom prst="roundRect">
+            <a:avLst/>
+          </a:prstGeom>
+          <a:solidFill>
+            <a:srgbClr val="F4F7FA"/>
+          </a:solidFill>
+          <a:ln w="12700">
+            <a:solidFill>
+              <a:srgbClr val="D6DCE2"/>
+            </a:solidFill>
+          </a:ln>
+        </p:spPr>
+        <p:style>
+          <a:lnRef idx="1">
+            <a:schemeClr val="accent1"/>
+          </a:lnRef>
+          <a:fillRef idx="3">
+            <a:schemeClr val="accent1"/>
+          </a:fillRef>
+          <a:effectRef idx="2">
+            <a:schemeClr val="accent1"/>
+          </a:effectRef>
+          <a:fontRef idx="minor">
+            <a:schemeClr val="lt1"/>
+          </a:fontRef>
+        </p:style>
+        <p:txBody>
+          <a:bodyPr rtlCol="0" anchor="ctr"/>
+          <a:lstStyle/>
+          <a:p>
+            <a:pPr algn="ctr"/>
+          </a:p>
+        </p:txBody>
+      </p:sp>
+      <p:sp>
+        <p:nvSpPr>
+          <p:cNvPr id="40" name="Rectangle 39"/>
+          <p:cNvSpPr/>
+          <p:nvPr/>
+        </p:nvSpPr>
+        <p:spPr>
+          <a:xfrm>
+            <a:off x="6181344" y="2852928"/>
+            <a:ext cx="64008" cy="877824"/>
+          </a:xfrm>
+          <a:prstGeom prst="rect">
+            <a:avLst/>
+          </a:prstGeom>
+          <a:solidFill>
+            <a:srgbClr val="0E2A47"/>
+          </a:solidFill>
+          <a:ln>
+            <a:noFill/>
+          </a:ln>
+        </p:spPr>
+        <p:style>
+          <a:lnRef idx="1">
+            <a:schemeClr val="accent1"/>
+          </a:lnRef>
+          <a:fillRef idx="3">
+            <a:schemeClr val="accent1"/>
+          </a:fillRef>
+          <a:effectRef idx="2">
+            <a:schemeClr val="accent1"/>
+          </a:effectRef>
+          <a:fontRef idx="minor">
+            <a:schemeClr val="lt1"/>
+          </a:fontRef>
+        </p:style>
+        <p:txBody>
+          <a:bodyPr rtlCol="0" anchor="ctr"/>
+          <a:lstStyle/>
+          <a:p>
+            <a:pPr algn="ctr"/>
+          </a:p>
+        </p:txBody>
+      </p:sp>
+      <p:sp>
+        <p:nvSpPr>
+          <p:cNvPr id="41" name="TextBox 40"/>
+          <p:cNvSpPr txBox="1"/>
+          <p:nvPr/>
+        </p:nvSpPr>
+        <p:spPr>
+          <a:xfrm>
+            <a:off x="6345936" y="2816352"/>
+            <a:ext cx="566928" cy="237744"/>
+          </a:xfrm>
+          <a:prstGeom prst="rect">
+            <a:avLst/>
+          </a:prstGeom>
+          <a:noFill/>
+        </p:spPr>
+        <p:txBody>
+          <a:bodyPr wrap="square" lIns="0" rIns="0" tIns="0" bIns="0" anchor="ctr"/>
+          <a:lstStyle/>
+          <a:p>
+            <a:pPr algn="l">
+              <a:spcBef>
+                <a:spcPts val="0"/>
+              </a:spcBef>
+              <a:spcAft>
+                <a:spcPts val="0"/>
+              </a:spcAft>
+            </a:pPr>
+            <a:r>
+              <a:rPr sz="1200" b="1">
+                <a:solidFill>
+                  <a:srgbClr val="0E2A47"/>
+                </a:solidFill>
+                <a:latin typeface="Microsoft YaHei"/>
+                <a:ea typeface="Microsoft YaHei"/>
+                <a:cs typeface="Microsoft YaHei"/>
+              </a:rPr>
+              <a:t>控制</a:t>
+            </a:r>
+          </a:p>
+        </p:txBody>
+      </p:sp>
+      <p:sp>
+        <p:nvSpPr>
+          <p:cNvPr id="42" name="TextBox 41"/>
+          <p:cNvSpPr txBox="1"/>
+          <p:nvPr/>
+        </p:nvSpPr>
+        <p:spPr>
+          <a:xfrm>
+            <a:off x="6931152" y="2807208"/>
+            <a:ext cx="4754880" cy="256032"/>
+          </a:xfrm>
+          <a:prstGeom prst="rect">
+            <a:avLst/>
+          </a:prstGeom>
+          <a:noFill/>
+        </p:spPr>
+        <p:txBody>
+          <a:bodyPr wrap="square" lIns="0" rIns="0" tIns="0" bIns="0" anchor="ctr"/>
+          <a:lstStyle/>
+          <a:p>
+            <a:pPr algn="l">
+              <a:spcBef>
+                <a:spcPts val="0"/>
+              </a:spcBef>
+              <a:spcAft>
+                <a:spcPts val="0"/>
+              </a:spcAft>
+            </a:pPr>
+            <a:r>
+              <a:rPr sz="1300" b="1">
+                <a:solidFill>
+                  <a:srgbClr val="1C242E"/>
+                </a:solidFill>
+                <a:latin typeface="Microsoft YaHei"/>
+                <a:ea typeface="Microsoft YaHei"/>
+                <a:cs typeface="Microsoft YaHei"/>
+              </a:rPr>
+              <a:t>Master  →  Decode</a:t>
+            </a:r>
+          </a:p>
+        </p:txBody>
+      </p:sp>
+      <p:sp>
+        <p:nvSpPr>
+          <p:cNvPr id="43" name="TextBox 42"/>
+          <p:cNvSpPr txBox="1"/>
+          <p:nvPr/>
+        </p:nvSpPr>
+        <p:spPr>
+          <a:xfrm>
+            <a:off x="6345936" y="3090672"/>
+            <a:ext cx="5340096" cy="676656"/>
+          </a:xfrm>
+          <a:prstGeom prst="rect">
+            <a:avLst/>
+          </a:prstGeom>
+          <a:noFill/>
+        </p:spPr>
+        <p:txBody>
+          <a:bodyPr wrap="square" lIns="0" rIns="0" tIns="0" bIns="0" anchor="t"/>
+          <a:lstStyle/>
+          <a:p>
+            <a:pPr algn="l">
+              <a:spcBef>
+                <a:spcPts val="0"/>
+              </a:spcBef>
+              <a:spcAft>
+                <a:spcPts val="0"/>
+              </a:spcAft>
+            </a:pPr>
+            <a:r>
+              <a:rPr sz="1200" b="0">
+                <a:solidFill>
+                  <a:srgbClr val="1C242E"/>
+                </a:solidFill>
+                <a:latin typeface="Microsoft YaHei"/>
+                <a:ea typeface="Microsoft YaHei"/>
+                <a:cs typeface="Microsoft YaHei"/>
+              </a:rPr>
+              <a:t>MEMORY 返回 endpoint 和 buffer_address。LOCAL_DISK 返回盘所在节点的 rpc。</a:t>
+            </a:r>
+          </a:p>
+        </p:txBody>
+      </p:sp>
+      <p:sp>
+        <p:nvSpPr>
+          <p:cNvPr id="44" name="Rounded Rectangle 43"/>
+          <p:cNvSpPr/>
+          <p:nvPr/>
+        </p:nvSpPr>
+        <p:spPr>
+          <a:xfrm>
+            <a:off x="6181344" y="3895344"/>
+            <a:ext cx="5632704" cy="1060704"/>
+          </a:xfrm>
+          <a:prstGeom prst="roundRect">
+            <a:avLst/>
+          </a:prstGeom>
+          <a:solidFill>
+            <a:srgbClr val="E7F3F2"/>
+          </a:solidFill>
+          <a:ln w="12700">
+            <a:solidFill>
+              <a:srgbClr val="D6DCE2"/>
+            </a:solidFill>
+          </a:ln>
+        </p:spPr>
+        <p:style>
+          <a:lnRef idx="1">
+            <a:schemeClr val="accent1"/>
+          </a:lnRef>
+          <a:fillRef idx="3">
+            <a:schemeClr val="accent1"/>
+          </a:fillRef>
+          <a:effectRef idx="2">
+            <a:schemeClr val="accent1"/>
+          </a:effectRef>
+          <a:fontRef idx="minor">
+            <a:schemeClr val="lt1"/>
+          </a:fontRef>
+        </p:style>
+        <p:txBody>
+          <a:bodyPr rtlCol="0" anchor="ctr"/>
+          <a:lstStyle/>
+          <a:p>
+            <a:pPr algn="ctr"/>
+          </a:p>
+        </p:txBody>
+      </p:sp>
+      <p:sp>
+        <p:nvSpPr>
+          <p:cNvPr id="45" name="Rectangle 44"/>
+          <p:cNvSpPr/>
+          <p:nvPr/>
+        </p:nvSpPr>
+        <p:spPr>
+          <a:xfrm>
+            <a:off x="6181344" y="3986783"/>
+            <a:ext cx="64008" cy="877824"/>
+          </a:xfrm>
+          <a:prstGeom prst="rect">
+            <a:avLst/>
+          </a:prstGeom>
+          <a:solidFill>
+            <a:srgbClr val="0E7A76"/>
+          </a:solidFill>
+          <a:ln>
+            <a:noFill/>
+          </a:ln>
+        </p:spPr>
+        <p:style>
+          <a:lnRef idx="1">
+            <a:schemeClr val="accent1"/>
+          </a:lnRef>
+          <a:fillRef idx="3">
+            <a:schemeClr val="accent1"/>
+          </a:fillRef>
+          <a:effectRef idx="2">
+            <a:schemeClr val="accent1"/>
+          </a:effectRef>
+          <a:fontRef idx="minor">
+            <a:schemeClr val="lt1"/>
+          </a:fontRef>
+        </p:style>
+        <p:txBody>
+          <a:bodyPr rtlCol="0" anchor="ctr"/>
+          <a:lstStyle/>
+          <a:p>
+            <a:pPr algn="ctr"/>
+          </a:p>
+        </p:txBody>
+      </p:sp>
+      <p:sp>
+        <p:nvSpPr>
+          <p:cNvPr id="46" name="TextBox 45"/>
+          <p:cNvSpPr txBox="1"/>
+          <p:nvPr/>
+        </p:nvSpPr>
+        <p:spPr>
+          <a:xfrm>
+            <a:off x="6345936" y="3950207"/>
+            <a:ext cx="566928" cy="237744"/>
+          </a:xfrm>
+          <a:prstGeom prst="rect">
+            <a:avLst/>
+          </a:prstGeom>
+          <a:noFill/>
+        </p:spPr>
+        <p:txBody>
+          <a:bodyPr wrap="square" lIns="0" rIns="0" tIns="0" bIns="0" anchor="ctr"/>
+          <a:lstStyle/>
+          <a:p>
+            <a:pPr algn="l">
+              <a:spcBef>
+                <a:spcPts val="0"/>
+              </a:spcBef>
+              <a:spcAft>
+                <a:spcPts val="0"/>
+              </a:spcAft>
+            </a:pPr>
+            <a:r>
+              <a:rPr sz="1200" b="1">
+                <a:solidFill>
+                  <a:srgbClr val="0E7A76"/>
+                </a:solidFill>
+                <a:latin typeface="Microsoft YaHei"/>
+                <a:ea typeface="Microsoft YaHei"/>
+                <a:cs typeface="Microsoft YaHei"/>
+              </a:rPr>
+              <a:t>数据</a:t>
+            </a:r>
+          </a:p>
+        </p:txBody>
+      </p:sp>
+      <p:sp>
+        <p:nvSpPr>
+          <p:cNvPr id="47" name="TextBox 46"/>
+          <p:cNvSpPr txBox="1"/>
+          <p:nvPr/>
+        </p:nvSpPr>
+        <p:spPr>
+          <a:xfrm>
+            <a:off x="6931152" y="3941063"/>
+            <a:ext cx="4754880" cy="256032"/>
+          </a:xfrm>
+          <a:prstGeom prst="rect">
+            <a:avLst/>
+          </a:prstGeom>
+          <a:noFill/>
+        </p:spPr>
+        <p:txBody>
+          <a:bodyPr wrap="square" lIns="0" rIns="0" tIns="0" bIns="0" anchor="ctr"/>
+          <a:lstStyle/>
+          <a:p>
+            <a:pPr algn="l">
+              <a:spcBef>
+                <a:spcPts val="0"/>
+              </a:spcBef>
+              <a:spcAft>
+                <a:spcPts val="0"/>
+              </a:spcAft>
+            </a:pPr>
+            <a:r>
+              <a:rPr sz="1300" b="1">
+                <a:solidFill>
+                  <a:srgbClr val="1C242E"/>
+                </a:solidFill>
+                <a:latin typeface="Microsoft YaHei"/>
+                <a:ea typeface="Microsoft YaHei"/>
+                <a:cs typeface="Microsoft YaHei"/>
+              </a:rPr>
+              <a:t>Decode  →  远端内存</a:t>
+            </a:r>
+          </a:p>
+        </p:txBody>
+      </p:sp>
+      <p:sp>
+        <p:nvSpPr>
+          <p:cNvPr id="48" name="TextBox 47"/>
+          <p:cNvSpPr txBox="1"/>
+          <p:nvPr/>
+        </p:nvSpPr>
+        <p:spPr>
+          <a:xfrm>
+            <a:off x="6345936" y="4224528"/>
+            <a:ext cx="5340096" cy="676656"/>
+          </a:xfrm>
+          <a:prstGeom prst="rect">
+            <a:avLst/>
+          </a:prstGeom>
+          <a:noFill/>
+        </p:spPr>
+        <p:txBody>
+          <a:bodyPr wrap="square" lIns="0" rIns="0" tIns="0" bIns="0" anchor="t"/>
+          <a:lstStyle/>
+          <a:p>
+            <a:pPr algn="l">
+              <a:spcBef>
+                <a:spcPts val="0"/>
+              </a:spcBef>
+              <a:spcAft>
+                <a:spcPts val="0"/>
+              </a:spcAft>
+            </a:pPr>
+            <a:r>
+              <a:rPr sz="1200" b="0">
+                <a:solidFill>
+                  <a:srgbClr val="1C242E"/>
+                </a:solidFill>
+                <a:latin typeface="Microsoft YaHei"/>
+                <a:ea typeface="Microsoft YaHei"/>
+                <a:cs typeface="Microsoft YaHei"/>
+              </a:rPr>
+              <a:t>内存副本直接 RDMA READ。盘副本先 RPC，对端把对象读进暂存，再 READ 这块暂存。</a:t>
+            </a:r>
+          </a:p>
+        </p:txBody>
+      </p:sp>
+      <p:sp>
+        <p:nvSpPr>
+          <p:cNvPr id="49" name="Rounded Rectangle 48"/>
+          <p:cNvSpPr/>
+          <p:nvPr/>
+        </p:nvSpPr>
+        <p:spPr>
+          <a:xfrm>
+            <a:off x="6181344" y="5029200"/>
+            <a:ext cx="5632704" cy="1060704"/>
+          </a:xfrm>
+          <a:prstGeom prst="roundRect">
+            <a:avLst/>
+          </a:prstGeom>
+          <a:solidFill>
+            <a:srgbClr val="F4F7FA"/>
+          </a:solidFill>
+          <a:ln w="12700">
+            <a:solidFill>
+              <a:srgbClr val="D6DCE2"/>
+            </a:solidFill>
+          </a:ln>
+        </p:spPr>
+        <p:style>
+          <a:lnRef idx="1">
+            <a:schemeClr val="accent1"/>
+          </a:lnRef>
+          <a:fillRef idx="3">
+            <a:schemeClr val="accent1"/>
+          </a:fillRef>
+          <a:effectRef idx="2">
+            <a:schemeClr val="accent1"/>
+          </a:effectRef>
+          <a:fontRef idx="minor">
+            <a:schemeClr val="lt1"/>
+          </a:fontRef>
+        </p:style>
+        <p:txBody>
+          <a:bodyPr rtlCol="0" anchor="ctr"/>
+          <a:lstStyle/>
+          <a:p>
+            <a:pPr algn="ctr"/>
+          </a:p>
+        </p:txBody>
+      </p:sp>
+      <p:sp>
+        <p:nvSpPr>
+          <p:cNvPr id="50" name="Rectangle 49"/>
+          <p:cNvSpPr/>
+          <p:nvPr/>
+        </p:nvSpPr>
+        <p:spPr>
+          <a:xfrm>
+            <a:off x="6181344" y="5120640"/>
+            <a:ext cx="64008" cy="877824"/>
+          </a:xfrm>
+          <a:prstGeom prst="rect">
+            <a:avLst/>
+          </a:prstGeom>
+          <a:solidFill>
+            <a:srgbClr val="0E2A47"/>
+          </a:solidFill>
+          <a:ln>
+            <a:noFill/>
+          </a:ln>
+        </p:spPr>
+        <p:style>
+          <a:lnRef idx="1">
+            <a:schemeClr val="accent1"/>
+          </a:lnRef>
+          <a:fillRef idx="3">
+            <a:schemeClr val="accent1"/>
+          </a:fillRef>
+          <a:effectRef idx="2">
+            <a:schemeClr val="accent1"/>
+          </a:effectRef>
+          <a:fontRef idx="minor">
+            <a:schemeClr val="lt1"/>
+          </a:fontRef>
+        </p:style>
+        <p:txBody>
+          <a:bodyPr rtlCol="0" anchor="ctr"/>
+          <a:lstStyle/>
+          <a:p>
+            <a:pPr algn="ctr"/>
+          </a:p>
+        </p:txBody>
+      </p:sp>
+      <p:sp>
+        <p:nvSpPr>
+          <p:cNvPr id="51" name="TextBox 50"/>
+          <p:cNvSpPr txBox="1"/>
+          <p:nvPr/>
+        </p:nvSpPr>
+        <p:spPr>
+          <a:xfrm>
+            <a:off x="6345936" y="5084064"/>
+            <a:ext cx="566928" cy="237744"/>
+          </a:xfrm>
+          <a:prstGeom prst="rect">
+            <a:avLst/>
+          </a:prstGeom>
+          <a:noFill/>
+        </p:spPr>
+        <p:txBody>
+          <a:bodyPr wrap="square" lIns="0" rIns="0" tIns="0" bIns="0" anchor="ctr"/>
+          <a:lstStyle/>
+          <a:p>
+            <a:pPr algn="l">
+              <a:spcBef>
+                <a:spcPts val="0"/>
+              </a:spcBef>
+              <a:spcAft>
+                <a:spcPts val="0"/>
+              </a:spcAft>
+            </a:pPr>
+            <a:r>
+              <a:rPr sz="1200" b="1">
+                <a:solidFill>
+                  <a:srgbClr val="0E2A47"/>
+                </a:solidFill>
+                <a:latin typeface="Microsoft YaHei"/>
+                <a:ea typeface="Microsoft YaHei"/>
+                <a:cs typeface="Microsoft YaHei"/>
+              </a:rPr>
+              <a:t>控制</a:t>
+            </a:r>
+          </a:p>
+        </p:txBody>
+      </p:sp>
+      <p:sp>
+        <p:nvSpPr>
+          <p:cNvPr id="52" name="TextBox 51"/>
+          <p:cNvSpPr txBox="1"/>
+          <p:nvPr/>
+        </p:nvSpPr>
+        <p:spPr>
+          <a:xfrm>
+            <a:off x="6931152" y="5074920"/>
+            <a:ext cx="4754880" cy="256032"/>
+          </a:xfrm>
+          <a:prstGeom prst="rect">
+            <a:avLst/>
+          </a:prstGeom>
+          <a:noFill/>
+        </p:spPr>
+        <p:txBody>
+          <a:bodyPr wrap="square" lIns="0" rIns="0" tIns="0" bIns="0" anchor="ctr"/>
+          <a:lstStyle/>
+          <a:p>
+            <a:pPr algn="l">
+              <a:spcBef>
+                <a:spcPts val="0"/>
+              </a:spcBef>
+              <a:spcAft>
+                <a:spcPts val="0"/>
+              </a:spcAft>
+            </a:pPr>
+            <a:r>
+              <a:rPr sz="1300" b="1">
+                <a:solidFill>
+                  <a:srgbClr val="1C242E"/>
+                </a:solidFill>
+                <a:latin typeface="Microsoft YaHei"/>
+                <a:ea typeface="Microsoft YaHei"/>
+                <a:cs typeface="Microsoft YaHei"/>
+              </a:rPr>
+              <a:t>本端 CQ  →  Decode</a:t>
+            </a:r>
+          </a:p>
+        </p:txBody>
+      </p:sp>
+      <p:sp>
+        <p:nvSpPr>
+          <p:cNvPr id="53" name="TextBox 52"/>
+          <p:cNvSpPr txBox="1"/>
+          <p:nvPr/>
+        </p:nvSpPr>
+        <p:spPr>
+          <a:xfrm>
+            <a:off x="6345936" y="5358384"/>
+            <a:ext cx="5340096" cy="676656"/>
+          </a:xfrm>
+          <a:prstGeom prst="rect">
+            <a:avLst/>
+          </a:prstGeom>
+          <a:noFill/>
+        </p:spPr>
+        <p:txBody>
+          <a:bodyPr wrap="square" lIns="0" rIns="0" tIns="0" bIns="0" anchor="t"/>
+          <a:lstStyle/>
+          <a:p>
+            <a:pPr algn="l">
+              <a:spcBef>
+                <a:spcPts val="0"/>
+              </a:spcBef>
+              <a:spcAft>
+                <a:spcPts val="0"/>
+              </a:spcAft>
+            </a:pPr>
+            <a:r>
+              <a:rPr sz="1200" b="0">
+                <a:solidFill>
+                  <a:srgbClr val="1C242E"/>
+                </a:solidFill>
+                <a:latin typeface="Microsoft YaHei"/>
+                <a:ea typeface="Microsoft YaHei"/>
+                <a:cs typeface="Microsoft YaHei"/>
+              </a:rPr>
+              <a:t>全部 slice 为 COMPLETED 后，前缀 KV 已经在本地 HBM，Decode 开始 attention。</a:t>
+            </a:r>
+          </a:p>
+        </p:txBody>
+      </p:sp>
+    </p:spTree>
+  </p:cSld>
+  <p:clrMapOvr>
+    <a:masterClrMapping/>
+  </p:clrMapOvr>
+</p:sld>
+</file>
+
+<file path=ppt/slides/slide2.xml><?xml version="1.0" encoding="utf-8"?>
+<p:sld xmlns:a="http://schemas.openxmlformats.org/drawingml/2006/main" xmlns:p="http://schemas.openxmlformats.org/presentationml/2006/main" xmlns:r="http://schemas.openxmlformats.org/officeDocument/2006/relationships">
+  <p:cSld>
+    <p:spTree>
+      <p:nvGrpSpPr>
+        <p:cNvPr id="1" name=""/>
+        <p:cNvGrpSpPr/>
+        <p:nvPr/>
+      </p:nvGrpSpPr>
+      <p:grpSpPr/>
+      <p:sp>
+        <p:nvSpPr>
+          <p:cNvPr id="2" name="Rectangle 1"/>
+          <p:cNvSpPr/>
+          <p:nvPr/>
+        </p:nvSpPr>
+        <p:spPr>
+          <a:xfrm>
+            <a:off x="0" y="0"/>
+            <a:ext cx="12191695" cy="73152"/>
+          </a:xfrm>
+          <a:prstGeom prst="rect">
+            <a:avLst/>
+          </a:prstGeom>
+          <a:solidFill>
+            <a:srgbClr val="145A96"/>
+          </a:solidFill>
+          <a:ln>
+            <a:noFill/>
+          </a:ln>
+        </p:spPr>
+        <p:style>
+          <a:lnRef idx="1">
+            <a:schemeClr val="accent1"/>
+          </a:lnRef>
+          <a:fillRef idx="3">
+            <a:schemeClr val="accent1"/>
+          </a:fillRef>
+          <a:effectRef idx="2">
+            <a:schemeClr val="accent1"/>
+          </a:effectRef>
+          <a:fontRef idx="minor">
+            <a:schemeClr val="lt1"/>
+          </a:fontRef>
+        </p:style>
+        <p:txBody>
+          <a:bodyPr rtlCol="0" anchor="ctr"/>
+          <a:lstStyle/>
+          <a:p>
+            <a:pPr algn="ctr"/>
+          </a:p>
+        </p:txBody>
+      </p:sp>
+      <p:sp>
+        <p:nvSpPr>
+          <p:cNvPr id="3" name="TextBox 2"/>
+          <p:cNvSpPr txBox="1"/>
+          <p:nvPr/>
+        </p:nvSpPr>
+        <p:spPr>
+          <a:xfrm>
+            <a:off x="384048" y="128016"/>
+            <a:ext cx="9509760" cy="219456"/>
+          </a:xfrm>
+          <a:prstGeom prst="rect">
+            <a:avLst/>
+          </a:prstGeom>
+          <a:noFill/>
+        </p:spPr>
+        <p:txBody>
+          <a:bodyPr wrap="square" lIns="0" rIns="0" tIns="0" bIns="0" anchor="ctr"/>
+          <a:lstStyle/>
+          <a:p>
+            <a:pPr algn="l">
+              <a:spcBef>
+                <a:spcPts val="0"/>
+              </a:spcBef>
+              <a:spcAft>
+                <a:spcPts val="0"/>
+              </a:spcAft>
+            </a:pPr>
+            <a:r>
+              <a:rPr sz="1200" b="1">
+                <a:solidFill>
+                  <a:srgbClr val="145A96"/>
+                </a:solidFill>
+                <a:latin typeface="Microsoft YaHei"/>
+                <a:ea typeface="Microsoft YaHei"/>
+                <a:cs typeface="Microsoft YaHei"/>
+              </a:rPr>
+              <a:t>Decode KV    ·    控制消息与单边 RDMA</a:t>
+            </a:r>
+          </a:p>
+        </p:txBody>
+      </p:sp>
+      <p:sp>
+        <p:nvSpPr>
+          <p:cNvPr id="4" name="TextBox 3"/>
+          <p:cNvSpPr txBox="1"/>
+          <p:nvPr/>
+        </p:nvSpPr>
+        <p:spPr>
+          <a:xfrm>
+            <a:off x="384048" y="347472"/>
+            <a:ext cx="10424160" cy="365760"/>
+          </a:xfrm>
+          <a:prstGeom prst="rect">
+            <a:avLst/>
+          </a:prstGeom>
+          <a:noFill/>
+        </p:spPr>
+        <p:txBody>
+          <a:bodyPr wrap="square" lIns="0" rIns="0" tIns="0" bIns="0" anchor="ctr"/>
+          <a:lstStyle/>
+          <a:p>
+            <a:pPr algn="l">
+              <a:spcBef>
+                <a:spcPts val="0"/>
+              </a:spcBef>
+              <a:spcAft>
+                <a:spcPts val="0"/>
+              </a:spcAft>
+            </a:pPr>
+            <a:r>
+              <a:rPr sz="2400" b="1">
+                <a:solidFill>
+                  <a:srgbClr val="0E2A47"/>
+                </a:solidFill>
+                <a:latin typeface="Microsoft YaHei"/>
+                <a:ea typeface="Microsoft YaHei"/>
+                <a:cs typeface="Microsoft YaHei"/>
+              </a:rPr>
+              <a:t>Decode 新 KV 先留在本端，入池才写出去</a:t>
+            </a:r>
+          </a:p>
+        </p:txBody>
+      </p:sp>
+      <p:sp>
+        <p:nvSpPr>
+          <p:cNvPr id="5" name="TextBox 4"/>
+          <p:cNvSpPr txBox="1"/>
+          <p:nvPr/>
+        </p:nvSpPr>
+        <p:spPr>
+          <a:xfrm>
+            <a:off x="10241280" y="146304"/>
+            <a:ext cx="1554480" cy="219456"/>
+          </a:xfrm>
+          <a:prstGeom prst="rect">
+            <a:avLst/>
+          </a:prstGeom>
+          <a:noFill/>
+        </p:spPr>
+        <p:txBody>
+          <a:bodyPr wrap="square" lIns="0" rIns="0" tIns="0" bIns="0" anchor="ctr"/>
+          <a:lstStyle/>
+          <a:p>
+            <a:pPr algn="r">
+              <a:spcBef>
+                <a:spcPts val="0"/>
+              </a:spcBef>
+              <a:spcAft>
+                <a:spcPts val="0"/>
+              </a:spcAft>
+            </a:pPr>
+            <a:r>
+              <a:rPr sz="1200" b="0">
+                <a:solidFill>
+                  <a:srgbClr val="5A636E"/>
+                </a:solidFill>
+                <a:latin typeface="Microsoft YaHei"/>
+                <a:ea typeface="Microsoft YaHei"/>
+                <a:cs typeface="Microsoft YaHei"/>
+              </a:rPr>
+              <a:t>2  /  2</a:t>
+            </a:r>
+          </a:p>
+        </p:txBody>
+      </p:sp>
+      <p:sp>
+        <p:nvSpPr>
+          <p:cNvPr id="6" name="Rectangle 5"/>
+          <p:cNvSpPr/>
+          <p:nvPr/>
+        </p:nvSpPr>
+        <p:spPr>
+          <a:xfrm>
+            <a:off x="384048" y="6565392"/>
+            <a:ext cx="11430000" cy="9144"/>
+          </a:xfrm>
+          <a:prstGeom prst="rect">
+            <a:avLst/>
+          </a:prstGeom>
+          <a:solidFill>
+            <a:srgbClr val="D6DCE2"/>
+          </a:solidFill>
+          <a:ln>
+            <a:noFill/>
+          </a:ln>
+        </p:spPr>
+        <p:style>
+          <a:lnRef idx="1">
+            <a:schemeClr val="accent1"/>
+          </a:lnRef>
+          <a:fillRef idx="3">
+            <a:schemeClr val="accent1"/>
+          </a:fillRef>
+          <a:effectRef idx="2">
+            <a:schemeClr val="accent1"/>
+          </a:effectRef>
+          <a:fontRef idx="minor">
+            <a:schemeClr val="lt1"/>
+          </a:fontRef>
+        </p:style>
+        <p:txBody>
+          <a:bodyPr rtlCol="0" anchor="ctr"/>
+          <a:lstStyle/>
+          <a:p>
+            <a:pPr algn="ctr"/>
+          </a:p>
+        </p:txBody>
+      </p:sp>
+      <p:sp>
+        <p:nvSpPr>
+          <p:cNvPr id="7" name="TextBox 6"/>
+          <p:cNvSpPr txBox="1"/>
+          <p:nvPr/>
+        </p:nvSpPr>
+        <p:spPr>
+          <a:xfrm>
+            <a:off x="384048" y="6583680"/>
+            <a:ext cx="11430000" cy="219456"/>
+          </a:xfrm>
+          <a:prstGeom prst="rect">
+            <a:avLst/>
+          </a:prstGeom>
+          <a:noFill/>
+        </p:spPr>
+        <p:txBody>
+          <a:bodyPr wrap="square" lIns="0" rIns="0" tIns="0" bIns="0" anchor="ctr"/>
+          <a:lstStyle/>
+          <a:p>
+            <a:pPr algn="l">
               <a:spcBef>
                 <a:spcPts val="0"/>
               </a:spcBef>
@@ -4056,23 +6067,108 @@
                 <a:ea typeface="Microsoft YaHei"/>
                 <a:cs typeface="Microsoft YaHei"/>
               </a:rPr>
-              <a:t>填好本次请求</a:t>
-            </a:r>
-          </a:p>
-        </p:txBody>
-      </p:sp>
-      <p:sp>
-        <p:nvSpPr>
-          <p:cNvPr id="15" name="Right Arrow 14"/>
+              <a:t>注册只做一次：ram 元数据含 addr、length、rkey；rpc_meta 含 ip 和 rpc_port；首次 QP 交换 qp_num、lid、gid</a:t>
+            </a:r>
+          </a:p>
+        </p:txBody>
+      </p:sp>
+      <p:sp>
+        <p:nvSpPr>
+          <p:cNvPr id="8" name="Rounded Rectangle 7"/>
           <p:cNvSpPr/>
           <p:nvPr/>
         </p:nvSpPr>
         <p:spPr>
           <a:xfrm>
-            <a:off x="2212848" y="2121408"/>
-            <a:ext cx="365760" cy="182880"/>
-          </a:xfrm>
-          <a:prstGeom prst="rightArrow">
+            <a:off x="384048" y="786384"/>
+            <a:ext cx="11430000" cy="347472"/>
+          </a:xfrm>
+          <a:prstGeom prst="roundRect">
+            <a:avLst/>
+          </a:prstGeom>
+          <a:solidFill>
+            <a:srgbClr val="E7F3F2"/>
+          </a:solidFill>
+          <a:ln>
+            <a:noFill/>
+          </a:ln>
+        </p:spPr>
+        <p:style>
+          <a:lnRef idx="1">
+            <a:schemeClr val="accent1"/>
+          </a:lnRef>
+          <a:fillRef idx="3">
+            <a:schemeClr val="accent1"/>
+          </a:fillRef>
+          <a:effectRef idx="2">
+            <a:schemeClr val="accent1"/>
+          </a:effectRef>
+          <a:fontRef idx="minor">
+            <a:schemeClr val="lt1"/>
+          </a:fontRef>
+        </p:style>
+        <p:txBody>
+          <a:bodyPr rtlCol="0" anchor="ctr"/>
+          <a:lstStyle/>
+          <a:p>
+            <a:pPr algn="ctr"/>
+          </a:p>
+        </p:txBody>
+      </p:sp>
+      <p:sp>
+        <p:nvSpPr>
+          <p:cNvPr id="9" name="TextBox 8"/>
+          <p:cNvSpPr txBox="1"/>
+          <p:nvPr/>
+        </p:nvSpPr>
+        <p:spPr>
+          <a:xfrm>
+            <a:off x="512064" y="786384"/>
+            <a:ext cx="11173968" cy="347472"/>
+          </a:xfrm>
+          <a:prstGeom prst="rect">
+            <a:avLst/>
+          </a:prstGeom>
+          <a:noFill/>
+        </p:spPr>
+        <p:txBody>
+          <a:bodyPr wrap="square" lIns="0" rIns="0" tIns="0" bIns="0" anchor="ctr"/>
+          <a:lstStyle/>
+          <a:p>
+            <a:pPr algn="l">
+              <a:spcBef>
+                <a:spcPts val="0"/>
+              </a:spcBef>
+              <a:spcAft>
+                <a:spcPts val="0"/>
+              </a:spcAft>
+            </a:pPr>
+            <a:r>
+              <a:rPr sz="1400" b="1">
+                <a:solidFill>
+                  <a:srgbClr val="0E7A76"/>
+                </a:solidFill>
+                <a:latin typeface="Microsoft YaHei"/>
+                <a:ea typeface="Microsoft YaHei"/>
+                <a:cs typeface="Microsoft YaHei"/>
+              </a:rPr>
+              <a:t>本步 attention 的 K、V 写进本地 HBM。MooncakeConnector 的 save_kv_layer 不向外发送。</a:t>
+            </a:r>
+          </a:p>
+        </p:txBody>
+      </p:sp>
+      <p:sp>
+        <p:nvSpPr>
+          <p:cNvPr id="10" name="Rounded Rectangle 9"/>
+          <p:cNvSpPr/>
+          <p:nvPr/>
+        </p:nvSpPr>
+        <p:spPr>
+          <a:xfrm>
+            <a:off x="384048" y="1243584"/>
+            <a:ext cx="5632704" cy="310896"/>
+          </a:xfrm>
+          <a:prstGeom prst="roundRect">
             <a:avLst/>
           </a:prstGeom>
           <a:solidFill>
@@ -4106,14 +6202,14 @@
       </p:sp>
       <p:sp>
         <p:nvSpPr>
-          <p:cNvPr id="16" name="TextBox 15"/>
+          <p:cNvPr id="11" name="TextBox 10"/>
           <p:cNvSpPr txBox="1"/>
           <p:nvPr/>
         </p:nvSpPr>
         <p:spPr>
           <a:xfrm>
-            <a:off x="1956816" y="1591056"/>
-            <a:ext cx="877824" cy="256032"/>
+            <a:off x="512064" y="1243584"/>
+            <a:ext cx="5376672" cy="310896"/>
           </a:xfrm>
           <a:prstGeom prst="rect">
             <a:avLst/>
@@ -4124,7 +6220,7 @@
           <a:bodyPr wrap="square" lIns="0" rIns="0" tIns="0" bIns="0" anchor="ctr"/>
           <a:lstStyle/>
           <a:p>
-            <a:pPr algn="ctr">
+            <a:pPr algn="l">
               <a:spcBef>
                 <a:spcPts val="0"/>
               </a:spcBef>
@@ -4133,29 +6229,328 @@
               </a:spcAft>
             </a:pPr>
             <a:r>
-              <a:rPr sz="1000" b="1">
+              <a:rPr sz="1400" b="1">
                 <a:solidFill>
-                  <a:srgbClr val="0E2A47"/>
+                  <a:srgbClr val="FFFFFF"/>
                 </a:solidFill>
                 <a:latin typeface="Microsoft YaHei"/>
                 <a:ea typeface="Microsoft YaHei"/>
                 <a:cs typeface="Microsoft YaHei"/>
               </a:rPr>
-              <a:t>READ 请求</a:t>
-            </a:r>
-          </a:p>
-        </p:txBody>
-      </p:sp>
-      <p:sp>
-        <p:nvSpPr>
-          <p:cNvPr id="17" name="Rounded Rectangle 16"/>
+              <a:t>默认    只留在本端 HBM</a:t>
+            </a:r>
+          </a:p>
+        </p:txBody>
+      </p:sp>
+      <p:sp>
+        <p:nvSpPr>
+          <p:cNvPr id="12" name="Rounded Rectangle 11"/>
           <p:cNvSpPr/>
           <p:nvPr/>
         </p:nvSpPr>
         <p:spPr>
           <a:xfrm>
-            <a:off x="2633472" y="1865376"/>
-            <a:ext cx="1700784" cy="713232"/>
+            <a:off x="6181344" y="1243584"/>
+            <a:ext cx="5632704" cy="310896"/>
+          </a:xfrm>
+          <a:prstGeom prst="roundRect">
+            <a:avLst/>
+          </a:prstGeom>
+          <a:solidFill>
+            <a:srgbClr val="0E7A76"/>
+          </a:solidFill>
+          <a:ln>
+            <a:noFill/>
+          </a:ln>
+        </p:spPr>
+        <p:style>
+          <a:lnRef idx="1">
+            <a:schemeClr val="accent1"/>
+          </a:lnRef>
+          <a:fillRef idx="3">
+            <a:schemeClr val="accent1"/>
+          </a:fillRef>
+          <a:effectRef idx="2">
+            <a:schemeClr val="accent1"/>
+          </a:effectRef>
+          <a:fontRef idx="minor">
+            <a:schemeClr val="lt1"/>
+          </a:fontRef>
+        </p:style>
+        <p:txBody>
+          <a:bodyPr rtlCol="0" anchor="ctr"/>
+          <a:lstStyle/>
+          <a:p>
+            <a:pPr algn="ctr"/>
+          </a:p>
+        </p:txBody>
+      </p:sp>
+      <p:sp>
+        <p:nvSpPr>
+          <p:cNvPr id="13" name="TextBox 12"/>
+          <p:cNvSpPr txBox="1"/>
+          <p:nvPr/>
+        </p:nvSpPr>
+        <p:spPr>
+          <a:xfrm>
+            <a:off x="6309359" y="1243584"/>
+            <a:ext cx="5376672" cy="310896"/>
+          </a:xfrm>
+          <a:prstGeom prst="rect">
+            <a:avLst/>
+          </a:prstGeom>
+          <a:noFill/>
+        </p:spPr>
+        <p:txBody>
+          <a:bodyPr wrap="square" lIns="0" rIns="0" tIns="0" bIns="0" anchor="ctr"/>
+          <a:lstStyle/>
+          <a:p>
+            <a:pPr algn="l">
+              <a:spcBef>
+                <a:spcPts val="0"/>
+              </a:spcBef>
+              <a:spcAft>
+                <a:spcPts val="0"/>
+              </a:spcAft>
+            </a:pPr>
+            <a:r>
+              <a:rPr sz="1400" b="1">
+                <a:solidFill>
+                  <a:srgbClr val="FFFFFF"/>
+                </a:solidFill>
+                <a:latin typeface="Microsoft YaHei"/>
+                <a:ea typeface="Microsoft YaHei"/>
+                <a:cs typeface="Microsoft YaHei"/>
+              </a:rPr>
+              <a:t>入池    控制面先分配，再 WRITE</a:t>
+            </a:r>
+          </a:p>
+        </p:txBody>
+      </p:sp>
+      <p:sp>
+        <p:nvSpPr>
+          <p:cNvPr id="14" name="Rounded Rectangle 13"/>
+          <p:cNvSpPr/>
+          <p:nvPr/>
+        </p:nvSpPr>
+        <p:spPr>
+          <a:xfrm>
+            <a:off x="384048" y="1645920"/>
+            <a:ext cx="5632704" cy="932688"/>
+          </a:xfrm>
+          <a:prstGeom prst="roundRect">
+            <a:avLst/>
+          </a:prstGeom>
+          <a:solidFill>
+            <a:srgbClr val="E7F3F2"/>
+          </a:solidFill>
+          <a:ln w="12700">
+            <a:solidFill>
+              <a:srgbClr val="D6DCE2"/>
+            </a:solidFill>
+          </a:ln>
+        </p:spPr>
+        <p:style>
+          <a:lnRef idx="1">
+            <a:schemeClr val="accent1"/>
+          </a:lnRef>
+          <a:fillRef idx="3">
+            <a:schemeClr val="accent1"/>
+          </a:fillRef>
+          <a:effectRef idx="2">
+            <a:schemeClr val="accent1"/>
+          </a:effectRef>
+          <a:fontRef idx="minor">
+            <a:schemeClr val="lt1"/>
+          </a:fontRef>
+        </p:style>
+        <p:txBody>
+          <a:bodyPr rtlCol="0" anchor="ctr"/>
+          <a:lstStyle/>
+          <a:p>
+            <a:pPr algn="ctr"/>
+          </a:p>
+        </p:txBody>
+      </p:sp>
+      <p:sp>
+        <p:nvSpPr>
+          <p:cNvPr id="15" name="Rectangle 14"/>
+          <p:cNvSpPr/>
+          <p:nvPr/>
+        </p:nvSpPr>
+        <p:spPr>
+          <a:xfrm>
+            <a:off x="384048" y="1737360"/>
+            <a:ext cx="64008" cy="749808"/>
+          </a:xfrm>
+          <a:prstGeom prst="rect">
+            <a:avLst/>
+          </a:prstGeom>
+          <a:solidFill>
+            <a:srgbClr val="0E7A76"/>
+          </a:solidFill>
+          <a:ln>
+            <a:noFill/>
+          </a:ln>
+        </p:spPr>
+        <p:style>
+          <a:lnRef idx="1">
+            <a:schemeClr val="accent1"/>
+          </a:lnRef>
+          <a:fillRef idx="3">
+            <a:schemeClr val="accent1"/>
+          </a:fillRef>
+          <a:effectRef idx="2">
+            <a:schemeClr val="accent1"/>
+          </a:effectRef>
+          <a:fontRef idx="minor">
+            <a:schemeClr val="lt1"/>
+          </a:fontRef>
+        </p:style>
+        <p:txBody>
+          <a:bodyPr rtlCol="0" anchor="ctr"/>
+          <a:lstStyle/>
+          <a:p>
+            <a:pPr algn="ctr"/>
+          </a:p>
+        </p:txBody>
+      </p:sp>
+      <p:sp>
+        <p:nvSpPr>
+          <p:cNvPr id="16" name="TextBox 15"/>
+          <p:cNvSpPr txBox="1"/>
+          <p:nvPr/>
+        </p:nvSpPr>
+        <p:spPr>
+          <a:xfrm>
+            <a:off x="548640" y="1700784"/>
+            <a:ext cx="566928" cy="237744"/>
+          </a:xfrm>
+          <a:prstGeom prst="rect">
+            <a:avLst/>
+          </a:prstGeom>
+          <a:noFill/>
+        </p:spPr>
+        <p:txBody>
+          <a:bodyPr wrap="square" lIns="0" rIns="0" tIns="0" bIns="0" anchor="ctr"/>
+          <a:lstStyle/>
+          <a:p>
+            <a:pPr algn="l">
+              <a:spcBef>
+                <a:spcPts val="0"/>
+              </a:spcBef>
+              <a:spcAft>
+                <a:spcPts val="0"/>
+              </a:spcAft>
+            </a:pPr>
+            <a:r>
+              <a:rPr sz="1200" b="1">
+                <a:solidFill>
+                  <a:srgbClr val="0E7A76"/>
+                </a:solidFill>
+                <a:latin typeface="Microsoft YaHei"/>
+                <a:ea typeface="Microsoft YaHei"/>
+                <a:cs typeface="Microsoft YaHei"/>
+              </a:rPr>
+              <a:t>数据</a:t>
+            </a:r>
+          </a:p>
+        </p:txBody>
+      </p:sp>
+      <p:sp>
+        <p:nvSpPr>
+          <p:cNvPr id="17" name="TextBox 16"/>
+          <p:cNvSpPr txBox="1"/>
+          <p:nvPr/>
+        </p:nvSpPr>
+        <p:spPr>
+          <a:xfrm>
+            <a:off x="1133856" y="1691640"/>
+            <a:ext cx="4754880" cy="256032"/>
+          </a:xfrm>
+          <a:prstGeom prst="rect">
+            <a:avLst/>
+          </a:prstGeom>
+          <a:noFill/>
+        </p:spPr>
+        <p:txBody>
+          <a:bodyPr wrap="square" lIns="0" rIns="0" tIns="0" bIns="0" anchor="ctr"/>
+          <a:lstStyle/>
+          <a:p>
+            <a:pPr algn="l">
+              <a:spcBef>
+                <a:spcPts val="0"/>
+              </a:spcBef>
+              <a:spcAft>
+                <a:spcPts val="0"/>
+              </a:spcAft>
+            </a:pPr>
+            <a:r>
+              <a:rPr sz="1300" b="1">
+                <a:solidFill>
+                  <a:srgbClr val="1C242E"/>
+                </a:solidFill>
+                <a:latin typeface="Microsoft YaHei"/>
+                <a:ea typeface="Microsoft YaHei"/>
+                <a:cs typeface="Microsoft YaHei"/>
+              </a:rPr>
+              <a:t>Attention  →  本端 HBM</a:t>
+            </a:r>
+          </a:p>
+        </p:txBody>
+      </p:sp>
+      <p:sp>
+        <p:nvSpPr>
+          <p:cNvPr id="18" name="TextBox 17"/>
+          <p:cNvSpPr txBox="1"/>
+          <p:nvPr/>
+        </p:nvSpPr>
+        <p:spPr>
+          <a:xfrm>
+            <a:off x="548640" y="1975104"/>
+            <a:ext cx="5340096" cy="548640"/>
+          </a:xfrm>
+          <a:prstGeom prst="rect">
+            <a:avLst/>
+          </a:prstGeom>
+          <a:noFill/>
+        </p:spPr>
+        <p:txBody>
+          <a:bodyPr wrap="square" lIns="0" rIns="0" tIns="0" bIns="0" anchor="t"/>
+          <a:lstStyle/>
+          <a:p>
+            <a:pPr algn="l">
+              <a:spcBef>
+                <a:spcPts val="0"/>
+              </a:spcBef>
+              <a:spcAft>
+                <a:spcPts val="0"/>
+              </a:spcAft>
+            </a:pPr>
+            <a:r>
+              <a:rPr sz="1200" b="0">
+                <a:solidFill>
+                  <a:srgbClr val="1C242E"/>
+                </a:solidFill>
+                <a:latin typeface="Microsoft YaHei"/>
+                <a:ea typeface="Microsoft YaHei"/>
+                <a:cs typeface="Microsoft YaHei"/>
+              </a:rPr>
+              <a:t>新 token 的 K 和 V 写入下一个本地 block。这一步没有 TransferRequest。</a:t>
+            </a:r>
+          </a:p>
+        </p:txBody>
+      </p:sp>
+      <p:sp>
+        <p:nvSpPr>
+          <p:cNvPr id="19" name="Rounded Rectangle 18"/>
+          <p:cNvSpPr/>
+          <p:nvPr/>
+        </p:nvSpPr>
+        <p:spPr>
+          <a:xfrm>
+            <a:off x="384048" y="2651760"/>
+            <a:ext cx="5632704" cy="932688"/>
           </a:xfrm>
           <a:prstGeom prst="roundRect">
             <a:avLst/>
@@ -4193,14 +6588,57 @@
       </p:sp>
       <p:sp>
         <p:nvSpPr>
-          <p:cNvPr id="18" name="TextBox 17"/>
+          <p:cNvPr id="20" name="Rectangle 19"/>
+          <p:cNvSpPr/>
+          <p:nvPr/>
+        </p:nvSpPr>
+        <p:spPr>
+          <a:xfrm>
+            <a:off x="384048" y="2743200"/>
+            <a:ext cx="64008" cy="749808"/>
+          </a:xfrm>
+          <a:prstGeom prst="rect">
+            <a:avLst/>
+          </a:prstGeom>
+          <a:solidFill>
+            <a:srgbClr val="0E2A47"/>
+          </a:solidFill>
+          <a:ln>
+            <a:noFill/>
+          </a:ln>
+        </p:spPr>
+        <p:style>
+          <a:lnRef idx="1">
+            <a:schemeClr val="accent1"/>
+          </a:lnRef>
+          <a:fillRef idx="3">
+            <a:schemeClr val="accent1"/>
+          </a:fillRef>
+          <a:effectRef idx="2">
+            <a:schemeClr val="accent1"/>
+          </a:effectRef>
+          <a:fontRef idx="minor">
+            <a:schemeClr val="lt1"/>
+          </a:fontRef>
+        </p:style>
+        <p:txBody>
+          <a:bodyPr rtlCol="0" anchor="ctr"/>
+          <a:lstStyle/>
+          <a:p>
+            <a:pPr algn="ctr"/>
+          </a:p>
+        </p:txBody>
+      </p:sp>
+      <p:sp>
+        <p:nvSpPr>
+          <p:cNvPr id="21" name="TextBox 20"/>
           <p:cNvSpPr txBox="1"/>
           <p:nvPr/>
         </p:nvSpPr>
         <p:spPr>
           <a:xfrm>
-            <a:off x="2706624" y="1938528"/>
-            <a:ext cx="1554480" cy="292608"/>
+            <a:off x="548640" y="2706624"/>
+            <a:ext cx="566928" cy="237744"/>
           </a:xfrm>
           <a:prstGeom prst="rect">
             <a:avLst/>
@@ -4211,7 +6649,7 @@
           <a:bodyPr wrap="square" lIns="0" rIns="0" tIns="0" bIns="0" anchor="ctr"/>
           <a:lstStyle/>
           <a:p>
-            <a:pPr algn="ctr">
+            <a:pPr algn="l">
               <a:spcBef>
                 <a:spcPts val="0"/>
               </a:spcBef>
@@ -4220,7 +6658,7 @@
               </a:spcAft>
             </a:pPr>
             <a:r>
-              <a:rPr sz="1400" b="1">
+              <a:rPr sz="1200" b="1">
                 <a:solidFill>
                   <a:srgbClr val="0E2A47"/>
                 </a:solidFill>
@@ -4228,21 +6666,21 @@
                 <a:ea typeface="Microsoft YaHei"/>
                 <a:cs typeface="Microsoft YaHei"/>
               </a:rPr>
-              <a:t>本端引擎</a:t>
-            </a:r>
-          </a:p>
-        </p:txBody>
-      </p:sp>
-      <p:sp>
-        <p:nvSpPr>
-          <p:cNvPr id="19" name="TextBox 18"/>
+              <a:t>控制</a:t>
+            </a:r>
+          </a:p>
+        </p:txBody>
+      </p:sp>
+      <p:sp>
+        <p:nvSpPr>
+          <p:cNvPr id="22" name="TextBox 21"/>
           <p:cNvSpPr txBox="1"/>
           <p:nvPr/>
         </p:nvSpPr>
         <p:spPr>
           <a:xfrm>
-            <a:off x="2706624" y="2231136"/>
-            <a:ext cx="1554480" cy="274320"/>
+            <a:off x="1133856" y="2697480"/>
+            <a:ext cx="4754880" cy="256032"/>
           </a:xfrm>
           <a:prstGeom prst="rect">
             <a:avLst/>
@@ -4253,7 +6691,7 @@
           <a:bodyPr wrap="square" lIns="0" rIns="0" tIns="0" bIns="0" anchor="ctr"/>
           <a:lstStyle/>
           <a:p>
-            <a:pPr algn="ctr">
+            <a:pPr algn="l">
               <a:spcBef>
                 <a:spcPts val="0"/>
               </a:spcBef>
@@ -4262,72 +6700,29 @@
               </a:spcAft>
             </a:pPr>
             <a:r>
-              <a:rPr sz="1100" b="0">
+              <a:rPr sz="1300" b="1">
                 <a:solidFill>
-                  <a:srgbClr val="5A636E"/>
+                  <a:srgbClr val="1C242E"/>
                 </a:solidFill>
                 <a:latin typeface="Microsoft YaHei"/>
                 <a:ea typeface="Microsoft YaHei"/>
                 <a:cs typeface="Microsoft YaHei"/>
               </a:rPr>
-              <a:t>切 slice，提交前控速</a:t>
-            </a:r>
-          </a:p>
-        </p:txBody>
-      </p:sp>
-      <p:sp>
-        <p:nvSpPr>
-          <p:cNvPr id="20" name="Right Arrow 19"/>
-          <p:cNvSpPr/>
-          <p:nvPr/>
-        </p:nvSpPr>
-        <p:spPr>
-          <a:xfrm>
-            <a:off x="4389120" y="2121408"/>
-            <a:ext cx="365760" cy="182880"/>
-          </a:xfrm>
-          <a:prstGeom prst="rightArrow">
-            <a:avLst/>
-          </a:prstGeom>
-          <a:solidFill>
-            <a:srgbClr val="0E2A47"/>
-          </a:solidFill>
-          <a:ln>
-            <a:noFill/>
-          </a:ln>
-        </p:spPr>
-        <p:style>
-          <a:lnRef idx="1">
-            <a:schemeClr val="accent1"/>
-          </a:lnRef>
-          <a:fillRef idx="3">
-            <a:schemeClr val="accent1"/>
-          </a:fillRef>
-          <a:effectRef idx="2">
-            <a:schemeClr val="accent1"/>
-          </a:effectRef>
-          <a:fontRef idx="minor">
-            <a:schemeClr val="lt1"/>
-          </a:fontRef>
-        </p:style>
-        <p:txBody>
-          <a:bodyPr rtlCol="0" anchor="ctr"/>
-          <a:lstStyle/>
-          <a:p>
-            <a:pPr algn="ctr"/>
-          </a:p>
-        </p:txBody>
-      </p:sp>
-      <p:sp>
-        <p:nvSpPr>
-          <p:cNvPr id="21" name="TextBox 20"/>
+              <a:t>调度  →  下一步 Decode</a:t>
+            </a:r>
+          </a:p>
+        </p:txBody>
+      </p:sp>
+      <p:sp>
+        <p:nvSpPr>
+          <p:cNvPr id="23" name="TextBox 22"/>
           <p:cNvSpPr txBox="1"/>
           <p:nvPr/>
         </p:nvSpPr>
         <p:spPr>
           <a:xfrm>
-            <a:off x="4133088" y="1591056"/>
-            <a:ext cx="877824" cy="256032"/>
+            <a:off x="548640" y="2980944"/>
+            <a:ext cx="5340096" cy="548640"/>
           </a:xfrm>
           <a:prstGeom prst="rect">
             <a:avLst/>
@@ -4335,10 +6730,10 @@
           <a:noFill/>
         </p:spPr>
         <p:txBody>
-          <a:bodyPr wrap="square" lIns="0" rIns="0" tIns="0" bIns="0" anchor="ctr"/>
-          <a:lstStyle/>
-          <a:p>
-            <a:pPr algn="ctr">
+          <a:bodyPr wrap="square" lIns="0" rIns="0" tIns="0" bIns="0" anchor="t"/>
+          <a:lstStyle/>
+          <a:p>
+            <a:pPr algn="l">
               <a:spcBef>
                 <a:spcPts val="0"/>
               </a:spcBef>
@@ -4347,29 +6742,29 @@
               </a:spcAft>
             </a:pPr>
             <a:r>
-              <a:rPr sz="1000" b="1">
+              <a:rPr sz="1200" b="0">
                 <a:solidFill>
-                  <a:srgbClr val="0E2A47"/>
+                  <a:srgbClr val="1C242E"/>
                 </a:solidFill>
                 <a:latin typeface="Microsoft YaHei"/>
                 <a:ea typeface="Microsoft YaHei"/>
                 <a:cs typeface="Microsoft YaHei"/>
               </a:rPr>
-              <a:t>RDMA READ</a:t>
-            </a:r>
-          </a:p>
-        </p:txBody>
-      </p:sp>
-      <p:sp>
-        <p:nvSpPr>
-          <p:cNvPr id="22" name="Rounded Rectangle 21"/>
+              <a:t>后续 token 直接读这块本地 KV。不查 Master，也不打开远端 segment。</a:t>
+            </a:r>
+          </a:p>
+        </p:txBody>
+      </p:sp>
+      <p:sp>
+        <p:nvSpPr>
+          <p:cNvPr id="24" name="Rounded Rectangle 23"/>
           <p:cNvSpPr/>
           <p:nvPr/>
         </p:nvSpPr>
         <p:spPr>
           <a:xfrm>
-            <a:off x="4809744" y="1865376"/>
-            <a:ext cx="1700784" cy="713232"/>
+            <a:off x="384048" y="3657600"/>
+            <a:ext cx="5632704" cy="932688"/>
           </a:xfrm>
           <a:prstGeom prst="roundRect">
             <a:avLst/>
@@ -4407,14 +6802,57 @@
       </p:sp>
       <p:sp>
         <p:nvSpPr>
-          <p:cNvPr id="23" name="TextBox 22"/>
+          <p:cNvPr id="25" name="Rectangle 24"/>
+          <p:cNvSpPr/>
+          <p:nvPr/>
+        </p:nvSpPr>
+        <p:spPr>
+          <a:xfrm>
+            <a:off x="384048" y="3749039"/>
+            <a:ext cx="64008" cy="749808"/>
+          </a:xfrm>
+          <a:prstGeom prst="rect">
+            <a:avLst/>
+          </a:prstGeom>
+          <a:solidFill>
+            <a:srgbClr val="0E2A47"/>
+          </a:solidFill>
+          <a:ln>
+            <a:noFill/>
+          </a:ln>
+        </p:spPr>
+        <p:style>
+          <a:lnRef idx="1">
+            <a:schemeClr val="accent1"/>
+          </a:lnRef>
+          <a:fillRef idx="3">
+            <a:schemeClr val="accent1"/>
+          </a:fillRef>
+          <a:effectRef idx="2">
+            <a:schemeClr val="accent1"/>
+          </a:effectRef>
+          <a:fontRef idx="minor">
+            <a:schemeClr val="lt1"/>
+          </a:fontRef>
+        </p:style>
+        <p:txBody>
+          <a:bodyPr rtlCol="0" anchor="ctr"/>
+          <a:lstStyle/>
+          <a:p>
+            <a:pPr algn="ctr"/>
+          </a:p>
+        </p:txBody>
+      </p:sp>
+      <p:sp>
+        <p:nvSpPr>
+          <p:cNvPr id="26" name="TextBox 25"/>
           <p:cNvSpPr txBox="1"/>
           <p:nvPr/>
         </p:nvSpPr>
         <p:spPr>
           <a:xfrm>
-            <a:off x="4882896" y="1938528"/>
-            <a:ext cx="1554480" cy="292608"/>
+            <a:off x="548640" y="3712463"/>
+            <a:ext cx="566928" cy="237744"/>
           </a:xfrm>
           <a:prstGeom prst="rect">
             <a:avLst/>
@@ -4425,7 +6863,7 @@
           <a:bodyPr wrap="square" lIns="0" rIns="0" tIns="0" bIns="0" anchor="ctr"/>
           <a:lstStyle/>
           <a:p>
-            <a:pPr algn="ctr">
+            <a:pPr algn="l">
               <a:spcBef>
                 <a:spcPts val="0"/>
               </a:spcBef>
@@ -4434,7 +6872,7 @@
               </a:spcAft>
             </a:pPr>
             <a:r>
-              <a:rPr sz="1400" b="1">
+              <a:rPr sz="1200" b="1">
                 <a:solidFill>
                   <a:srgbClr val="0E2A47"/>
                 </a:solidFill>
@@ -4442,21 +6880,21 @@
                 <a:ea typeface="Microsoft YaHei"/>
                 <a:cs typeface="Microsoft YaHei"/>
               </a:rPr>
-              <a:t>本端网卡</a:t>
-            </a:r>
-          </a:p>
-        </p:txBody>
-      </p:sp>
-      <p:sp>
-        <p:nvSpPr>
-          <p:cNvPr id="24" name="TextBox 23"/>
+              <a:t>控制</a:t>
+            </a:r>
+          </a:p>
+        </p:txBody>
+      </p:sp>
+      <p:sp>
+        <p:nvSpPr>
+          <p:cNvPr id="27" name="TextBox 26"/>
           <p:cNvSpPr txBox="1"/>
           <p:nvPr/>
         </p:nvSpPr>
         <p:spPr>
           <a:xfrm>
-            <a:off x="4882896" y="2231136"/>
-            <a:ext cx="1554480" cy="274320"/>
+            <a:off x="1133856" y="3703320"/>
+            <a:ext cx="4754880" cy="256032"/>
           </a:xfrm>
           <a:prstGeom prst="rect">
             <a:avLst/>
@@ -4467,7 +6905,7 @@
           <a:bodyPr wrap="square" lIns="0" rIns="0" tIns="0" bIns="0" anchor="ctr"/>
           <a:lstStyle/>
           <a:p>
-            <a:pPr algn="ctr">
+            <a:pPr algn="l">
               <a:spcBef>
                 <a:spcPts val="0"/>
               </a:spcBef>
@@ -4476,72 +6914,29 @@
               </a:spcAft>
             </a:pPr>
             <a:r>
-              <a:rPr sz="1100" b="0">
+              <a:rPr sz="1300" b="1">
                 <a:solidFill>
-                  <a:srgbClr val="5A636E"/>
+                  <a:srgbClr val="1C242E"/>
                 </a:solidFill>
                 <a:latin typeface="Microsoft YaHei"/>
                 <a:ea typeface="Microsoft YaHei"/>
                 <a:cs typeface="Microsoft YaHei"/>
               </a:rPr>
-              <a:t>post WR，收 CQ</a:t>
-            </a:r>
-          </a:p>
-        </p:txBody>
-      </p:sp>
-      <p:sp>
-        <p:nvSpPr>
-          <p:cNvPr id="25" name="Right Arrow 24"/>
-          <p:cNvSpPr/>
-          <p:nvPr/>
-        </p:nvSpPr>
-        <p:spPr>
-          <a:xfrm>
-            <a:off x="6565392" y="2121408"/>
-            <a:ext cx="365760" cy="182880"/>
-          </a:xfrm>
-          <a:prstGeom prst="rightArrow">
-            <a:avLst/>
-          </a:prstGeom>
-          <a:solidFill>
-            <a:srgbClr val="0E2A47"/>
-          </a:solidFill>
-          <a:ln>
-            <a:noFill/>
-          </a:ln>
-        </p:spPr>
-        <p:style>
-          <a:lnRef idx="1">
-            <a:schemeClr val="accent1"/>
-          </a:lnRef>
-          <a:fillRef idx="3">
-            <a:schemeClr val="accent1"/>
-          </a:fillRef>
-          <a:effectRef idx="2">
-            <a:schemeClr val="accent1"/>
-          </a:effectRef>
-          <a:fontRef idx="minor">
-            <a:schemeClr val="lt1"/>
-          </a:fontRef>
-        </p:style>
-        <p:txBody>
-          <a:bodyPr rtlCol="0" anchor="ctr"/>
-          <a:lstStyle/>
-          <a:p>
-            <a:pPr algn="ctr"/>
-          </a:p>
-        </p:txBody>
-      </p:sp>
-      <p:sp>
-        <p:nvSpPr>
-          <p:cNvPr id="26" name="TextBox 25"/>
+              <a:t>请求结束  →  仍在本地</a:t>
+            </a:r>
+          </a:p>
+        </p:txBody>
+      </p:sp>
+      <p:sp>
+        <p:nvSpPr>
+          <p:cNvPr id="28" name="TextBox 27"/>
           <p:cNvSpPr txBox="1"/>
           <p:nvPr/>
         </p:nvSpPr>
         <p:spPr>
           <a:xfrm>
-            <a:off x="6309360" y="1591056"/>
-            <a:ext cx="877824" cy="256032"/>
+            <a:off x="548640" y="3986784"/>
+            <a:ext cx="5340096" cy="548640"/>
           </a:xfrm>
           <a:prstGeom prst="rect">
             <a:avLst/>
@@ -4549,10 +6944,10 @@
           <a:noFill/>
         </p:spPr>
         <p:txBody>
-          <a:bodyPr wrap="square" lIns="0" rIns="0" tIns="0" bIns="0" anchor="ctr"/>
-          <a:lstStyle/>
-          <a:p>
-            <a:pPr algn="ctr">
+          <a:bodyPr wrap="square" lIns="0" rIns="0" tIns="0" bIns="0" anchor="t"/>
+          <a:lstStyle/>
+          <a:p>
+            <a:pPr algn="l">
               <a:spcBef>
                 <a:spcPts val="0"/>
               </a:spcBef>
@@ -4561,29 +6956,29 @@
               </a:spcAft>
             </a:pPr>
             <a:r>
-              <a:rPr sz="1000" b="1">
+              <a:rPr sz="1200" b="0">
                 <a:solidFill>
-                  <a:srgbClr val="0E2A47"/>
+                  <a:srgbClr val="1C242E"/>
                 </a:solidFill>
                 <a:latin typeface="Microsoft YaHei"/>
                 <a:ea typeface="Microsoft YaHei"/>
                 <a:cs typeface="Microsoft YaHei"/>
               </a:rPr>
-              <a:t>地址 + rkey</a:t>
-            </a:r>
-          </a:p>
-        </p:txBody>
-      </p:sp>
-      <p:sp>
-        <p:nvSpPr>
-          <p:cNvPr id="27" name="Rounded Rectangle 26"/>
+              <a:t>Connector 不把 Decode 新 KV 推回 Prefill。要复用才走右侧入池。</a:t>
+            </a:r>
+          </a:p>
+        </p:txBody>
+      </p:sp>
+      <p:sp>
+        <p:nvSpPr>
+          <p:cNvPr id="29" name="Rounded Rectangle 28"/>
           <p:cNvSpPr/>
           <p:nvPr/>
         </p:nvSpPr>
         <p:spPr>
           <a:xfrm>
-            <a:off x="6986016" y="1865376"/>
-            <a:ext cx="1700784" cy="713232"/>
+            <a:off x="384048" y="4681728"/>
+            <a:ext cx="5632704" cy="1024128"/>
           </a:xfrm>
           <a:prstGeom prst="roundRect">
             <a:avLst/>
@@ -4621,14 +7016,14 @@
       </p:sp>
       <p:sp>
         <p:nvSpPr>
-          <p:cNvPr id="28" name="TextBox 27"/>
+          <p:cNvPr id="30" name="TextBox 29"/>
           <p:cNvSpPr txBox="1"/>
           <p:nvPr/>
         </p:nvSpPr>
         <p:spPr>
           <a:xfrm>
-            <a:off x="7059168" y="1938528"/>
-            <a:ext cx="1554480" cy="292608"/>
+            <a:off x="530352" y="4754880"/>
+            <a:ext cx="5340096" cy="877824"/>
           </a:xfrm>
           <a:prstGeom prst="rect">
             <a:avLst/>
@@ -4636,10 +7031,10 @@
           <a:noFill/>
         </p:spPr>
         <p:txBody>
-          <a:bodyPr wrap="square" lIns="0" rIns="0" tIns="0" bIns="0" anchor="ctr"/>
-          <a:lstStyle/>
-          <a:p>
-            <a:pPr algn="ctr">
+          <a:bodyPr wrap="square" lIns="0" rIns="0" tIns="0" bIns="0" anchor="t"/>
+          <a:lstStyle/>
+          <a:p>
+            <a:pPr algn="l">
               <a:spcBef>
                 <a:spcPts val="0"/>
               </a:spcBef>
@@ -4648,156 +7043,29 @@
               </a:spcAft>
             </a:pPr>
             <a:r>
-              <a:rPr sz="1400" b="1">
+              <a:rPr sz="1300" b="0">
                 <a:solidFill>
-                  <a:srgbClr val="0E2A47"/>
+                  <a:srgbClr val="1C242E"/>
                 </a:solidFill>
                 <a:latin typeface="Microsoft YaHei"/>
                 <a:ea typeface="Microsoft YaHei"/>
                 <a:cs typeface="Microsoft YaHei"/>
               </a:rPr>
-              <a:t>对端网卡</a:t>
-            </a:r>
-          </a:p>
-        </p:txBody>
-      </p:sp>
-      <p:sp>
-        <p:nvSpPr>
-          <p:cNvPr id="29" name="TextBox 28"/>
-          <p:cNvSpPr txBox="1"/>
-          <p:nvPr/>
-        </p:nvSpPr>
-        <p:spPr>
-          <a:xfrm>
-            <a:off x="7059168" y="2231136"/>
-            <a:ext cx="1554480" cy="274320"/>
-          </a:xfrm>
-          <a:prstGeom prst="rect">
-            <a:avLst/>
-          </a:prstGeom>
-          <a:noFill/>
-        </p:spPr>
-        <p:txBody>
-          <a:bodyPr wrap="square" lIns="0" rIns="0" tIns="0" bIns="0" anchor="ctr"/>
-          <a:lstStyle/>
-          <a:p>
-            <a:pPr algn="ctr">
-              <a:spcBef>
-                <a:spcPts val="0"/>
-              </a:spcBef>
-              <a:spcAft>
-                <a:spcPts val="0"/>
-              </a:spcAft>
-            </a:pPr>
-            <a:r>
-              <a:rPr sz="1100" b="0">
-                <a:solidFill>
-                  <a:srgbClr val="5A636E"/>
-                </a:solidFill>
-                <a:latin typeface="Microsoft YaHei"/>
-                <a:ea typeface="Microsoft YaHei"/>
-                <a:cs typeface="Microsoft YaHei"/>
-              </a:rPr>
-              <a:t>只做 DMA</a:t>
-            </a:r>
-          </a:p>
-        </p:txBody>
-      </p:sp>
-      <p:sp>
-        <p:nvSpPr>
-          <p:cNvPr id="30" name="Right Arrow 29"/>
+              <a:t>这块 HBM 在启动时已经注册。下一步 Decode 按本地 block 地址读取，不打开远端 segment，也不产生完成队列。</a:t>
+            </a:r>
+          </a:p>
+        </p:txBody>
+      </p:sp>
+      <p:sp>
+        <p:nvSpPr>
+          <p:cNvPr id="31" name="Rounded Rectangle 30"/>
           <p:cNvSpPr/>
           <p:nvPr/>
         </p:nvSpPr>
         <p:spPr>
           <a:xfrm>
-            <a:off x="8741664" y="2121408"/>
-            <a:ext cx="365760" cy="182880"/>
-          </a:xfrm>
-          <a:prstGeom prst="rightArrow">
-            <a:avLst/>
-          </a:prstGeom>
-          <a:solidFill>
-            <a:srgbClr val="0E2A47"/>
-          </a:solidFill>
-          <a:ln>
-            <a:noFill/>
-          </a:ln>
-        </p:spPr>
-        <p:style>
-          <a:lnRef idx="1">
-            <a:schemeClr val="accent1"/>
-          </a:lnRef>
-          <a:fillRef idx="3">
-            <a:schemeClr val="accent1"/>
-          </a:fillRef>
-          <a:effectRef idx="2">
-            <a:schemeClr val="accent1"/>
-          </a:effectRef>
-          <a:fontRef idx="minor">
-            <a:schemeClr val="lt1"/>
-          </a:fontRef>
-        </p:style>
-        <p:txBody>
-          <a:bodyPr rtlCol="0" anchor="ctr"/>
-          <a:lstStyle/>
-          <a:p>
-            <a:pPr algn="ctr"/>
-          </a:p>
-        </p:txBody>
-      </p:sp>
-      <p:sp>
-        <p:nvSpPr>
-          <p:cNvPr id="31" name="TextBox 30"/>
-          <p:cNvSpPr txBox="1"/>
-          <p:nvPr/>
-        </p:nvSpPr>
-        <p:spPr>
-          <a:xfrm>
-            <a:off x="8485632" y="1591056"/>
-            <a:ext cx="877824" cy="256032"/>
-          </a:xfrm>
-          <a:prstGeom prst="rect">
-            <a:avLst/>
-          </a:prstGeom>
-          <a:noFill/>
-        </p:spPr>
-        <p:txBody>
-          <a:bodyPr wrap="square" lIns="0" rIns="0" tIns="0" bIns="0" anchor="ctr"/>
-          <a:lstStyle/>
-          <a:p>
-            <a:pPr algn="ctr">
-              <a:spcBef>
-                <a:spcPts val="0"/>
-              </a:spcBef>
-              <a:spcAft>
-                <a:spcPts val="0"/>
-              </a:spcAft>
-            </a:pPr>
-            <a:r>
-              <a:rPr sz="1000" b="1">
-                <a:solidFill>
-                  <a:srgbClr val="0E2A47"/>
-                </a:solidFill>
-                <a:latin typeface="Microsoft YaHei"/>
-                <a:ea typeface="Microsoft YaHei"/>
-                <a:cs typeface="Microsoft YaHei"/>
-              </a:rPr>
-              <a:t>读出字节</a:t>
-            </a:r>
-          </a:p>
-        </p:txBody>
-      </p:sp>
-      <p:sp>
-        <p:nvSpPr>
-          <p:cNvPr id="32" name="Rounded Rectangle 31"/>
-          <p:cNvSpPr/>
-          <p:nvPr/>
-        </p:nvSpPr>
-        <p:spPr>
-          <a:xfrm>
-            <a:off x="9162288" y="1865376"/>
-            <a:ext cx="1700784" cy="713232"/>
+            <a:off x="6181344" y="1645920"/>
+            <a:ext cx="5632704" cy="768096"/>
           </a:xfrm>
           <a:prstGeom prst="roundRect">
             <a:avLst/>
@@ -4835,14 +7103,57 @@
       </p:sp>
       <p:sp>
         <p:nvSpPr>
+          <p:cNvPr id="32" name="Rectangle 31"/>
+          <p:cNvSpPr/>
+          <p:nvPr/>
+        </p:nvSpPr>
+        <p:spPr>
+          <a:xfrm>
+            <a:off x="6181344" y="1737360"/>
+            <a:ext cx="64008" cy="585215"/>
+          </a:xfrm>
+          <a:prstGeom prst="rect">
+            <a:avLst/>
+          </a:prstGeom>
+          <a:solidFill>
+            <a:srgbClr val="0E2A47"/>
+          </a:solidFill>
+          <a:ln>
+            <a:noFill/>
+          </a:ln>
+        </p:spPr>
+        <p:style>
+          <a:lnRef idx="1">
+            <a:schemeClr val="accent1"/>
+          </a:lnRef>
+          <a:fillRef idx="3">
+            <a:schemeClr val="accent1"/>
+          </a:fillRef>
+          <a:effectRef idx="2">
+            <a:schemeClr val="accent1"/>
+          </a:effectRef>
+          <a:fontRef idx="minor">
+            <a:schemeClr val="lt1"/>
+          </a:fontRef>
+        </p:style>
+        <p:txBody>
+          <a:bodyPr rtlCol="0" anchor="ctr"/>
+          <a:lstStyle/>
+          <a:p>
+            <a:pPr algn="ctr"/>
+          </a:p>
+        </p:txBody>
+      </p:sp>
+      <p:sp>
+        <p:nvSpPr>
           <p:cNvPr id="33" name="TextBox 32"/>
           <p:cNvSpPr txBox="1"/>
           <p:nvPr/>
         </p:nvSpPr>
         <p:spPr>
           <a:xfrm>
-            <a:off x="9235440" y="1938528"/>
-            <a:ext cx="1554480" cy="292608"/>
+            <a:off x="6345936" y="1700784"/>
+            <a:ext cx="566928" cy="237744"/>
           </a:xfrm>
           <a:prstGeom prst="rect">
             <a:avLst/>
@@ -4853,7 +7164,7 @@
           <a:bodyPr wrap="square" lIns="0" rIns="0" tIns="0" bIns="0" anchor="ctr"/>
           <a:lstStyle/>
           <a:p>
-            <a:pPr algn="ctr">
+            <a:pPr algn="l">
               <a:spcBef>
                 <a:spcPts val="0"/>
               </a:spcBef>
@@ -4862,7 +7173,7 @@
               </a:spcAft>
             </a:pPr>
             <a:r>
-              <a:rPr sz="1400" b="1">
+              <a:rPr sz="1200" b="1">
                 <a:solidFill>
                   <a:srgbClr val="0E2A47"/>
                 </a:solidFill>
@@ -4870,7 +7181,7 @@
                 <a:ea typeface="Microsoft YaHei"/>
                 <a:cs typeface="Microsoft YaHei"/>
               </a:rPr>
-              <a:t>对端内存</a:t>
+              <a:t>控制</a:t>
             </a:r>
           </a:p>
         </p:txBody>
@@ -4883,8 +7194,8 @@
         </p:nvSpPr>
         <p:spPr>
           <a:xfrm>
-            <a:off x="9235440" y="2231136"/>
-            <a:ext cx="1554480" cy="274320"/>
+            <a:off x="6931152" y="1691640"/>
+            <a:ext cx="4754880" cy="256032"/>
           </a:xfrm>
           <a:prstGeom prst="rect">
             <a:avLst/>
@@ -4895,7 +7206,7 @@
           <a:bodyPr wrap="square" lIns="0" rIns="0" tIns="0" bIns="0" anchor="ctr"/>
           <a:lstStyle/>
           <a:p>
-            <a:pPr algn="ctr">
+            <a:pPr algn="l">
               <a:spcBef>
                 <a:spcPts val="0"/>
               </a:spcBef>
@@ -4904,72 +7215,29 @@
               </a:spcAft>
             </a:pPr>
             <a:r>
-              <a:rPr sz="1100" b="0">
+              <a:rPr sz="1300" b="1">
                 <a:solidFill>
-                  <a:srgbClr val="5A636E"/>
+                  <a:srgbClr val="1C242E"/>
                 </a:solidFill>
                 <a:latin typeface="Microsoft YaHei"/>
                 <a:ea typeface="Microsoft YaHei"/>
                 <a:cs typeface="Microsoft YaHei"/>
               </a:rPr>
-              <a:t>已注册的 DDR</a:t>
-            </a:r>
-          </a:p>
-        </p:txBody>
-      </p:sp>
-      <p:sp>
-        <p:nvSpPr>
-          <p:cNvPr id="35" name="Rounded Rectangle 34"/>
-          <p:cNvSpPr/>
-          <p:nvPr/>
-        </p:nvSpPr>
-        <p:spPr>
-          <a:xfrm>
-            <a:off x="384048" y="2651760"/>
-            <a:ext cx="11430000" cy="365760"/>
-          </a:xfrm>
-          <a:prstGeom prst="roundRect">
-            <a:avLst/>
-          </a:prstGeom>
-          <a:solidFill>
-            <a:srgbClr val="F4F7FA"/>
-          </a:solidFill>
-          <a:ln>
-            <a:noFill/>
-          </a:ln>
-        </p:spPr>
-        <p:style>
-          <a:lnRef idx="1">
-            <a:schemeClr val="accent1"/>
-          </a:lnRef>
-          <a:fillRef idx="3">
-            <a:schemeClr val="accent1"/>
-          </a:fillRef>
-          <a:effectRef idx="2">
-            <a:schemeClr val="accent1"/>
-          </a:effectRef>
-          <a:fontRef idx="minor">
-            <a:schemeClr val="lt1"/>
-          </a:fontRef>
-        </p:style>
-        <p:txBody>
-          <a:bodyPr rtlCol="0" anchor="ctr"/>
-          <a:lstStyle/>
-          <a:p>
-            <a:pPr algn="ctr"/>
-          </a:p>
-        </p:txBody>
-      </p:sp>
-      <p:sp>
-        <p:nvSpPr>
-          <p:cNvPr id="36" name="TextBox 35"/>
+              <a:t>Decode  →  Master</a:t>
+            </a:r>
+          </a:p>
+        </p:txBody>
+      </p:sp>
+      <p:sp>
+        <p:nvSpPr>
+          <p:cNvPr id="35" name="TextBox 34"/>
           <p:cNvSpPr txBox="1"/>
           <p:nvPr/>
         </p:nvSpPr>
         <p:spPr>
           <a:xfrm>
-            <a:off x="512064" y="2651760"/>
-            <a:ext cx="11173968" cy="365760"/>
+            <a:off x="6345936" y="1975104"/>
+            <a:ext cx="5340096" cy="384048"/>
           </a:xfrm>
           <a:prstGeom prst="rect">
             <a:avLst/>
@@ -4977,7 +7245,7 @@
           <a:noFill/>
         </p:spPr>
         <p:txBody>
-          <a:bodyPr wrap="square" lIns="0" rIns="0" tIns="0" bIns="0" anchor="ctr"/>
+          <a:bodyPr wrap="square" lIns="0" rIns="0" tIns="0" bIns="0" anchor="t"/>
           <a:lstStyle/>
           <a:p>
             <a:pPr algn="l">
@@ -4997,30 +7265,32 @@
                 <a:ea typeface="Microsoft YaHei"/>
                 <a:cs typeface="Microsoft YaHei"/>
               </a:rPr>
-              <a:t>返回：字节由对端网卡送回本端网卡，写入本地 source。CQ 在本端，调用方得到 COMPLETED。对端没有软件响应。</a:t>
-            </a:r>
-          </a:p>
-        </p:txBody>
-      </p:sp>
-      <p:sp>
-        <p:nvSpPr>
-          <p:cNvPr id="37" name="Rounded Rectangle 36"/>
+              <a:t>PutStart(key, 字节数)。对象先记为 PROCESSING，读者还看不见。</a:t>
+            </a:r>
+          </a:p>
+        </p:txBody>
+      </p:sp>
+      <p:sp>
+        <p:nvSpPr>
+          <p:cNvPr id="36" name="Rounded Rectangle 35"/>
           <p:cNvSpPr/>
           <p:nvPr/>
         </p:nvSpPr>
         <p:spPr>
           <a:xfrm>
-            <a:off x="384048" y="3456432"/>
-            <a:ext cx="11430000" cy="292608"/>
+            <a:off x="6181344" y="2468880"/>
+            <a:ext cx="5632704" cy="768096"/>
           </a:xfrm>
           <a:prstGeom prst="roundRect">
             <a:avLst/>
           </a:prstGeom>
           <a:solidFill>
-            <a:srgbClr val="0E7A76"/>
+            <a:srgbClr val="F4F7FA"/>
           </a:solidFill>
-          <a:ln>
-            <a:noFill/>
+          <a:ln w="12700">
+            <a:solidFill>
+              <a:srgbClr val="D6DCE2"/>
+            </a:solidFill>
           </a:ln>
         </p:spPr>
         <p:style>
@@ -5047,14 +7317,57 @@
       </p:sp>
       <p:sp>
         <p:nvSpPr>
+          <p:cNvPr id="37" name="Rectangle 36"/>
+          <p:cNvSpPr/>
+          <p:nvPr/>
+        </p:nvSpPr>
+        <p:spPr>
+          <a:xfrm>
+            <a:off x="6181344" y="2560320"/>
+            <a:ext cx="64008" cy="585215"/>
+          </a:xfrm>
+          <a:prstGeom prst="rect">
+            <a:avLst/>
+          </a:prstGeom>
+          <a:solidFill>
+            <a:srgbClr val="0E2A47"/>
+          </a:solidFill>
+          <a:ln>
+            <a:noFill/>
+          </a:ln>
+        </p:spPr>
+        <p:style>
+          <a:lnRef idx="1">
+            <a:schemeClr val="accent1"/>
+          </a:lnRef>
+          <a:fillRef idx="3">
+            <a:schemeClr val="accent1"/>
+          </a:fillRef>
+          <a:effectRef idx="2">
+            <a:schemeClr val="accent1"/>
+          </a:effectRef>
+          <a:fontRef idx="minor">
+            <a:schemeClr val="lt1"/>
+          </a:fontRef>
+        </p:style>
+        <p:txBody>
+          <a:bodyPr rtlCol="0" anchor="ctr"/>
+          <a:lstStyle/>
+          <a:p>
+            <a:pPr algn="ctr"/>
+          </a:p>
+        </p:txBody>
+      </p:sp>
+      <p:sp>
+        <p:nvSpPr>
           <p:cNvPr id="38" name="TextBox 37"/>
           <p:cNvSpPr txBox="1"/>
           <p:nvPr/>
         </p:nvSpPr>
         <p:spPr>
           <a:xfrm>
-            <a:off x="512064" y="3456432"/>
-            <a:ext cx="11155680" cy="292608"/>
+            <a:off x="6345936" y="2523744"/>
+            <a:ext cx="566928" cy="237744"/>
           </a:xfrm>
           <a:prstGeom prst="rect">
             <a:avLst/>
@@ -5074,29 +7387,113 @@
               </a:spcAft>
             </a:pPr>
             <a:r>
-              <a:rPr sz="1400" b="1">
+              <a:rPr sz="1200" b="1">
                 <a:solidFill>
-                  <a:srgbClr val="FFFFFF"/>
+                  <a:srgbClr val="0E2A47"/>
                 </a:solidFill>
                 <a:latin typeface="Microsoft YaHei"/>
                 <a:ea typeface="Microsoft YaHei"/>
                 <a:cs typeface="Microsoft YaHei"/>
               </a:rPr>
-              <a:t>WRITE    本端把本地 KV 推进远端内存</a:t>
-            </a:r>
-          </a:p>
-        </p:txBody>
-      </p:sp>
-      <p:sp>
-        <p:nvSpPr>
-          <p:cNvPr id="39" name="Rounded Rectangle 38"/>
+              <a:t>控制</a:t>
+            </a:r>
+          </a:p>
+        </p:txBody>
+      </p:sp>
+      <p:sp>
+        <p:nvSpPr>
+          <p:cNvPr id="39" name="TextBox 38"/>
+          <p:cNvSpPr txBox="1"/>
+          <p:nvPr/>
+        </p:nvSpPr>
+        <p:spPr>
+          <a:xfrm>
+            <a:off x="6931152" y="2514600"/>
+            <a:ext cx="4754880" cy="256032"/>
+          </a:xfrm>
+          <a:prstGeom prst="rect">
+            <a:avLst/>
+          </a:prstGeom>
+          <a:noFill/>
+        </p:spPr>
+        <p:txBody>
+          <a:bodyPr wrap="square" lIns="0" rIns="0" tIns="0" bIns="0" anchor="ctr"/>
+          <a:lstStyle/>
+          <a:p>
+            <a:pPr algn="l">
+              <a:spcBef>
+                <a:spcPts val="0"/>
+              </a:spcBef>
+              <a:spcAft>
+                <a:spcPts val="0"/>
+              </a:spcAft>
+            </a:pPr>
+            <a:r>
+              <a:rPr sz="1300" b="1">
+                <a:solidFill>
+                  <a:srgbClr val="1C242E"/>
+                </a:solidFill>
+                <a:latin typeface="Microsoft YaHei"/>
+                <a:ea typeface="Microsoft YaHei"/>
+                <a:cs typeface="Microsoft YaHei"/>
+              </a:rPr>
+              <a:t>Master  →  Decode</a:t>
+            </a:r>
+          </a:p>
+        </p:txBody>
+      </p:sp>
+      <p:sp>
+        <p:nvSpPr>
+          <p:cNvPr id="40" name="TextBox 39"/>
+          <p:cNvSpPr txBox="1"/>
+          <p:nvPr/>
+        </p:nvSpPr>
+        <p:spPr>
+          <a:xfrm>
+            <a:off x="6345936" y="2798064"/>
+            <a:ext cx="5340096" cy="384048"/>
+          </a:xfrm>
+          <a:prstGeom prst="rect">
+            <a:avLst/>
+          </a:prstGeom>
+          <a:noFill/>
+        </p:spPr>
+        <p:txBody>
+          <a:bodyPr wrap="square" lIns="0" rIns="0" tIns="0" bIns="0" anchor="t"/>
+          <a:lstStyle/>
+          <a:p>
+            <a:pPr algn="l">
+              <a:spcBef>
+                <a:spcPts val="0"/>
+              </a:spcBef>
+              <a:spcAft>
+                <a:spcPts val="0"/>
+              </a:spcAft>
+            </a:pPr>
+            <a:r>
+              <a:rPr sz="1200" b="0">
+                <a:solidFill>
+                  <a:srgbClr val="1C242E"/>
+                </a:solidFill>
+                <a:latin typeface="Microsoft YaHei"/>
+                <a:ea typeface="Microsoft YaHei"/>
+                <a:cs typeface="Microsoft YaHei"/>
+              </a:rPr>
+              <a:t>返回 segment 和 offset。本机 segment 是 Host DDR，远端 segment 是 remote DDR。</a:t>
+            </a:r>
+          </a:p>
+        </p:txBody>
+      </p:sp>
+      <p:sp>
+        <p:nvSpPr>
+          <p:cNvPr id="41" name="Rounded Rectangle 40"/>
           <p:cNvSpPr/>
           <p:nvPr/>
         </p:nvSpPr>
         <p:spPr>
           <a:xfrm>
-            <a:off x="457200" y="4078224"/>
-            <a:ext cx="1700784" cy="713232"/>
+            <a:off x="6181344" y="3291840"/>
+            <a:ext cx="5632704" cy="768096"/>
           </a:xfrm>
           <a:prstGeom prst="roundRect">
             <a:avLst/>
@@ -5134,14 +7531,57 @@
       </p:sp>
       <p:sp>
         <p:nvSpPr>
-          <p:cNvPr id="40" name="TextBox 39"/>
+          <p:cNvPr id="42" name="Rectangle 41"/>
+          <p:cNvSpPr/>
+          <p:nvPr/>
+        </p:nvSpPr>
+        <p:spPr>
+          <a:xfrm>
+            <a:off x="6181344" y="3383280"/>
+            <a:ext cx="64008" cy="585215"/>
+          </a:xfrm>
+          <a:prstGeom prst="rect">
+            <a:avLst/>
+          </a:prstGeom>
+          <a:solidFill>
+            <a:srgbClr val="0E7A76"/>
+          </a:solidFill>
+          <a:ln>
+            <a:noFill/>
+          </a:ln>
+        </p:spPr>
+        <p:style>
+          <a:lnRef idx="1">
+            <a:schemeClr val="accent1"/>
+          </a:lnRef>
+          <a:fillRef idx="3">
+            <a:schemeClr val="accent1"/>
+          </a:fillRef>
+          <a:effectRef idx="2">
+            <a:schemeClr val="accent1"/>
+          </a:effectRef>
+          <a:fontRef idx="minor">
+            <a:schemeClr val="lt1"/>
+          </a:fontRef>
+        </p:style>
+        <p:txBody>
+          <a:bodyPr rtlCol="0" anchor="ctr"/>
+          <a:lstStyle/>
+          <a:p>
+            <a:pPr algn="ctr"/>
+          </a:p>
+        </p:txBody>
+      </p:sp>
+      <p:sp>
+        <p:nvSpPr>
+          <p:cNvPr id="43" name="TextBox 42"/>
           <p:cNvSpPr txBox="1"/>
           <p:nvPr/>
         </p:nvSpPr>
         <p:spPr>
           <a:xfrm>
-            <a:off x="530352" y="4151376"/>
-            <a:ext cx="1554480" cy="292608"/>
+            <a:off x="6345936" y="3346704"/>
+            <a:ext cx="566928" cy="237744"/>
           </a:xfrm>
           <a:prstGeom prst="rect">
             <a:avLst/>
@@ -5152,7 +7592,7 @@
           <a:bodyPr wrap="square" lIns="0" rIns="0" tIns="0" bIns="0" anchor="ctr"/>
           <a:lstStyle/>
           <a:p>
-            <a:pPr algn="ctr">
+            <a:pPr algn="l">
               <a:spcBef>
                 <a:spcPts val="0"/>
               </a:spcBef>
@@ -5161,7 +7601,7 @@
               </a:spcAft>
             </a:pPr>
             <a:r>
-              <a:rPr sz="1400" b="1">
+              <a:rPr sz="1200" b="1">
                 <a:solidFill>
                   <a:srgbClr val="0E7A76"/>
                 </a:solidFill>
@@ -5169,21 +7609,21 @@
                 <a:ea typeface="Microsoft YaHei"/>
                 <a:cs typeface="Microsoft YaHei"/>
               </a:rPr>
-              <a:t>调用方</a:t>
-            </a:r>
-          </a:p>
-        </p:txBody>
-      </p:sp>
-      <p:sp>
-        <p:nvSpPr>
-          <p:cNvPr id="41" name="TextBox 40"/>
+              <a:t>数据</a:t>
+            </a:r>
+          </a:p>
+        </p:txBody>
+      </p:sp>
+      <p:sp>
+        <p:nvSpPr>
+          <p:cNvPr id="44" name="TextBox 43"/>
           <p:cNvSpPr txBox="1"/>
           <p:nvPr/>
         </p:nvSpPr>
         <p:spPr>
           <a:xfrm>
-            <a:off x="530352" y="4443984"/>
-            <a:ext cx="1554480" cy="274320"/>
+            <a:off x="6931152" y="3337560"/>
+            <a:ext cx="4754880" cy="256032"/>
           </a:xfrm>
           <a:prstGeom prst="rect">
             <a:avLst/>
@@ -5194,7 +7634,7 @@
           <a:bodyPr wrap="square" lIns="0" rIns="0" tIns="0" bIns="0" anchor="ctr"/>
           <a:lstStyle/>
           <a:p>
-            <a:pPr algn="ctr">
+            <a:pPr algn="l">
               <a:spcBef>
                 <a:spcPts val="0"/>
               </a:spcBef>
@@ -5203,146 +7643,16 @@
               </a:spcAft>
             </a:pPr>
             <a:r>
-              <a:rPr sz="1100" b="0">
+              <a:rPr sz="1300" b="1">
                 <a:solidFill>
-                  <a:srgbClr val="5A636E"/>
+                  <a:srgbClr val="1C242E"/>
                 </a:solidFill>
                 <a:latin typeface="Microsoft YaHei"/>
                 <a:ea typeface="Microsoft YaHei"/>
                 <a:cs typeface="Microsoft YaHei"/>
               </a:rPr>
-              <a:t>填好本次请求</a:t>
-            </a:r>
-          </a:p>
-        </p:txBody>
-      </p:sp>
-      <p:sp>
-        <p:nvSpPr>
-          <p:cNvPr id="42" name="Right Arrow 41"/>
-          <p:cNvSpPr/>
-          <p:nvPr/>
-        </p:nvSpPr>
-        <p:spPr>
-          <a:xfrm>
-            <a:off x="2212848" y="4334256"/>
-            <a:ext cx="365760" cy="182880"/>
-          </a:xfrm>
-          <a:prstGeom prst="rightArrow">
-            <a:avLst/>
-          </a:prstGeom>
-          <a:solidFill>
-            <a:srgbClr val="0E7A76"/>
-          </a:solidFill>
-          <a:ln>
-            <a:noFill/>
-          </a:ln>
-        </p:spPr>
-        <p:style>
-          <a:lnRef idx="1">
-            <a:schemeClr val="accent1"/>
-          </a:lnRef>
-          <a:fillRef idx="3">
-            <a:schemeClr val="accent1"/>
-          </a:fillRef>
-          <a:effectRef idx="2">
-            <a:schemeClr val="accent1"/>
-          </a:effectRef>
-          <a:fontRef idx="minor">
-            <a:schemeClr val="lt1"/>
-          </a:fontRef>
-        </p:style>
-        <p:txBody>
-          <a:bodyPr rtlCol="0" anchor="ctr"/>
-          <a:lstStyle/>
-          <a:p>
-            <a:pPr algn="ctr"/>
-          </a:p>
-        </p:txBody>
-      </p:sp>
-      <p:sp>
-        <p:nvSpPr>
-          <p:cNvPr id="43" name="TextBox 42"/>
-          <p:cNvSpPr txBox="1"/>
-          <p:nvPr/>
-        </p:nvSpPr>
-        <p:spPr>
-          <a:xfrm>
-            <a:off x="1956816" y="3803904"/>
-            <a:ext cx="877824" cy="256032"/>
-          </a:xfrm>
-          <a:prstGeom prst="rect">
-            <a:avLst/>
-          </a:prstGeom>
-          <a:noFill/>
-        </p:spPr>
-        <p:txBody>
-          <a:bodyPr wrap="square" lIns="0" rIns="0" tIns="0" bIns="0" anchor="ctr"/>
-          <a:lstStyle/>
-          <a:p>
-            <a:pPr algn="ctr">
-              <a:spcBef>
-                <a:spcPts val="0"/>
-              </a:spcBef>
-              <a:spcAft>
-                <a:spcPts val="0"/>
-              </a:spcAft>
-            </a:pPr>
-            <a:r>
-              <a:rPr sz="1000" b="1">
-                <a:solidFill>
-                  <a:srgbClr val="0E7A76"/>
-                </a:solidFill>
-                <a:latin typeface="Microsoft YaHei"/>
-                <a:ea typeface="Microsoft YaHei"/>
-                <a:cs typeface="Microsoft YaHei"/>
-              </a:rPr>
-              <a:t>WRITE 请求</a:t>
-            </a:r>
-          </a:p>
-        </p:txBody>
-      </p:sp>
-      <p:sp>
-        <p:nvSpPr>
-          <p:cNvPr id="44" name="Rounded Rectangle 43"/>
-          <p:cNvSpPr/>
-          <p:nvPr/>
-        </p:nvSpPr>
-        <p:spPr>
-          <a:xfrm>
-            <a:off x="2633472" y="4078224"/>
-            <a:ext cx="1700784" cy="713232"/>
-          </a:xfrm>
-          <a:prstGeom prst="roundRect">
-            <a:avLst/>
-          </a:prstGeom>
-          <a:solidFill>
-            <a:srgbClr val="E7F3F2"/>
-          </a:solidFill>
-          <a:ln w="12700">
-            <a:solidFill>
-              <a:srgbClr val="D6DCE2"/>
-            </a:solidFill>
-          </a:ln>
-        </p:spPr>
-        <p:style>
-          <a:lnRef idx="1">
-            <a:schemeClr val="accent1"/>
-          </a:lnRef>
-          <a:fillRef idx="3">
-            <a:schemeClr val="accent1"/>
-          </a:fillRef>
-          <a:effectRef idx="2">
-            <a:schemeClr val="accent1"/>
-          </a:effectRef>
-          <a:fontRef idx="minor">
-            <a:schemeClr val="lt1"/>
-          </a:fontRef>
-        </p:style>
-        <p:txBody>
-          <a:bodyPr rtlCol="0" anchor="ctr"/>
-          <a:lstStyle/>
-          <a:p>
-            <a:pPr algn="ctr"/>
+              <a:t>Decode  →  这段内存</a:t>
+            </a:r>
           </a:p>
         </p:txBody>
       </p:sp>
@@ -5354,8 +7664,8 @@
         </p:nvSpPr>
         <p:spPr>
           <a:xfrm>
-            <a:off x="2706624" y="4151376"/>
-            <a:ext cx="1554480" cy="292608"/>
+            <a:off x="6345936" y="3621024"/>
+            <a:ext cx="5340096" cy="384048"/>
           </a:xfrm>
           <a:prstGeom prst="rect">
             <a:avLst/>
@@ -5363,776 +7673,7 @@
           <a:noFill/>
         </p:spPr>
         <p:txBody>
-          <a:bodyPr wrap="square" lIns="0" rIns="0" tIns="0" bIns="0" anchor="ctr"/>
-          <a:lstStyle/>
-          <a:p>
-            <a:pPr algn="ctr">
-              <a:spcBef>
-                <a:spcPts val="0"/>
-              </a:spcBef>
-              <a:spcAft>
-                <a:spcPts val="0"/>
-              </a:spcAft>
-            </a:pPr>
-            <a:r>
-              <a:rPr sz="1400" b="1">
-                <a:solidFill>
-                  <a:srgbClr val="0E7A76"/>
-                </a:solidFill>
-                <a:latin typeface="Microsoft YaHei"/>
-                <a:ea typeface="Microsoft YaHei"/>
-                <a:cs typeface="Microsoft YaHei"/>
-              </a:rPr>
-              <a:t>本端引擎</a:t>
-            </a:r>
-          </a:p>
-        </p:txBody>
-      </p:sp>
-      <p:sp>
-        <p:nvSpPr>
-          <p:cNvPr id="46" name="TextBox 45"/>
-          <p:cNvSpPr txBox="1"/>
-          <p:nvPr/>
-        </p:nvSpPr>
-        <p:spPr>
-          <a:xfrm>
-            <a:off x="2706624" y="4443984"/>
-            <a:ext cx="1554480" cy="274320"/>
-          </a:xfrm>
-          <a:prstGeom prst="rect">
-            <a:avLst/>
-          </a:prstGeom>
-          <a:noFill/>
-        </p:spPr>
-        <p:txBody>
-          <a:bodyPr wrap="square" lIns="0" rIns="0" tIns="0" bIns="0" anchor="ctr"/>
-          <a:lstStyle/>
-          <a:p>
-            <a:pPr algn="ctr">
-              <a:spcBef>
-                <a:spcPts val="0"/>
-              </a:spcBef>
-              <a:spcAft>
-                <a:spcPts val="0"/>
-              </a:spcAft>
-            </a:pPr>
-            <a:r>
-              <a:rPr sz="1100" b="0">
-                <a:solidFill>
-                  <a:srgbClr val="5A636E"/>
-                </a:solidFill>
-                <a:latin typeface="Microsoft YaHei"/>
-                <a:ea typeface="Microsoft YaHei"/>
-                <a:cs typeface="Microsoft YaHei"/>
-              </a:rPr>
-              <a:t>切 slice，提交前控速</a:t>
-            </a:r>
-          </a:p>
-        </p:txBody>
-      </p:sp>
-      <p:sp>
-        <p:nvSpPr>
-          <p:cNvPr id="47" name="Right Arrow 46"/>
-          <p:cNvSpPr/>
-          <p:nvPr/>
-        </p:nvSpPr>
-        <p:spPr>
-          <a:xfrm>
-            <a:off x="4389120" y="4334256"/>
-            <a:ext cx="365760" cy="182880"/>
-          </a:xfrm>
-          <a:prstGeom prst="rightArrow">
-            <a:avLst/>
-          </a:prstGeom>
-          <a:solidFill>
-            <a:srgbClr val="0E7A76"/>
-          </a:solidFill>
-          <a:ln>
-            <a:noFill/>
-          </a:ln>
-        </p:spPr>
-        <p:style>
-          <a:lnRef idx="1">
-            <a:schemeClr val="accent1"/>
-          </a:lnRef>
-          <a:fillRef idx="3">
-            <a:schemeClr val="accent1"/>
-          </a:fillRef>
-          <a:effectRef idx="2">
-            <a:schemeClr val="accent1"/>
-          </a:effectRef>
-          <a:fontRef idx="minor">
-            <a:schemeClr val="lt1"/>
-          </a:fontRef>
-        </p:style>
-        <p:txBody>
-          <a:bodyPr rtlCol="0" anchor="ctr"/>
-          <a:lstStyle/>
-          <a:p>
-            <a:pPr algn="ctr"/>
-          </a:p>
-        </p:txBody>
-      </p:sp>
-      <p:sp>
-        <p:nvSpPr>
-          <p:cNvPr id="48" name="TextBox 47"/>
-          <p:cNvSpPr txBox="1"/>
-          <p:nvPr/>
-        </p:nvSpPr>
-        <p:spPr>
-          <a:xfrm>
-            <a:off x="4133088" y="3803904"/>
-            <a:ext cx="877824" cy="256032"/>
-          </a:xfrm>
-          <a:prstGeom prst="rect">
-            <a:avLst/>
-          </a:prstGeom>
-          <a:noFill/>
-        </p:spPr>
-        <p:txBody>
-          <a:bodyPr wrap="square" lIns="0" rIns="0" tIns="0" bIns="0" anchor="ctr"/>
-          <a:lstStyle/>
-          <a:p>
-            <a:pPr algn="ctr">
-              <a:spcBef>
-                <a:spcPts val="0"/>
-              </a:spcBef>
-              <a:spcAft>
-                <a:spcPts val="0"/>
-              </a:spcAft>
-            </a:pPr>
-            <a:r>
-              <a:rPr sz="1000" b="1">
-                <a:solidFill>
-                  <a:srgbClr val="0E7A76"/>
-                </a:solidFill>
-                <a:latin typeface="Microsoft YaHei"/>
-                <a:ea typeface="Microsoft YaHei"/>
-                <a:cs typeface="Microsoft YaHei"/>
-              </a:rPr>
-              <a:t>RDMA WRITE</a:t>
-            </a:r>
-          </a:p>
-        </p:txBody>
-      </p:sp>
-      <p:sp>
-        <p:nvSpPr>
-          <p:cNvPr id="49" name="Rounded Rectangle 48"/>
-          <p:cNvSpPr/>
-          <p:nvPr/>
-        </p:nvSpPr>
-        <p:spPr>
-          <a:xfrm>
-            <a:off x="4809744" y="4078224"/>
-            <a:ext cx="1700784" cy="713232"/>
-          </a:xfrm>
-          <a:prstGeom prst="roundRect">
-            <a:avLst/>
-          </a:prstGeom>
-          <a:solidFill>
-            <a:srgbClr val="E7F3F2"/>
-          </a:solidFill>
-          <a:ln w="12700">
-            <a:solidFill>
-              <a:srgbClr val="D6DCE2"/>
-            </a:solidFill>
-          </a:ln>
-        </p:spPr>
-        <p:style>
-          <a:lnRef idx="1">
-            <a:schemeClr val="accent1"/>
-          </a:lnRef>
-          <a:fillRef idx="3">
-            <a:schemeClr val="accent1"/>
-          </a:fillRef>
-          <a:effectRef idx="2">
-            <a:schemeClr val="accent1"/>
-          </a:effectRef>
-          <a:fontRef idx="minor">
-            <a:schemeClr val="lt1"/>
-          </a:fontRef>
-        </p:style>
-        <p:txBody>
-          <a:bodyPr rtlCol="0" anchor="ctr"/>
-          <a:lstStyle/>
-          <a:p>
-            <a:pPr algn="ctr"/>
-          </a:p>
-        </p:txBody>
-      </p:sp>
-      <p:sp>
-        <p:nvSpPr>
-          <p:cNvPr id="50" name="TextBox 49"/>
-          <p:cNvSpPr txBox="1"/>
-          <p:nvPr/>
-        </p:nvSpPr>
-        <p:spPr>
-          <a:xfrm>
-            <a:off x="4882896" y="4151376"/>
-            <a:ext cx="1554480" cy="292608"/>
-          </a:xfrm>
-          <a:prstGeom prst="rect">
-            <a:avLst/>
-          </a:prstGeom>
-          <a:noFill/>
-        </p:spPr>
-        <p:txBody>
-          <a:bodyPr wrap="square" lIns="0" rIns="0" tIns="0" bIns="0" anchor="ctr"/>
-          <a:lstStyle/>
-          <a:p>
-            <a:pPr algn="ctr">
-              <a:spcBef>
-                <a:spcPts val="0"/>
-              </a:spcBef>
-              <a:spcAft>
-                <a:spcPts val="0"/>
-              </a:spcAft>
-            </a:pPr>
-            <a:r>
-              <a:rPr sz="1400" b="1">
-                <a:solidFill>
-                  <a:srgbClr val="0E7A76"/>
-                </a:solidFill>
-                <a:latin typeface="Microsoft YaHei"/>
-                <a:ea typeface="Microsoft YaHei"/>
-                <a:cs typeface="Microsoft YaHei"/>
-              </a:rPr>
-              <a:t>本端网卡</a:t>
-            </a:r>
-          </a:p>
-        </p:txBody>
-      </p:sp>
-      <p:sp>
-        <p:nvSpPr>
-          <p:cNvPr id="51" name="TextBox 50"/>
-          <p:cNvSpPr txBox="1"/>
-          <p:nvPr/>
-        </p:nvSpPr>
-        <p:spPr>
-          <a:xfrm>
-            <a:off x="4882896" y="4443984"/>
-            <a:ext cx="1554480" cy="274320"/>
-          </a:xfrm>
-          <a:prstGeom prst="rect">
-            <a:avLst/>
-          </a:prstGeom>
-          <a:noFill/>
-        </p:spPr>
-        <p:txBody>
-          <a:bodyPr wrap="square" lIns="0" rIns="0" tIns="0" bIns="0" anchor="ctr"/>
-          <a:lstStyle/>
-          <a:p>
-            <a:pPr algn="ctr">
-              <a:spcBef>
-                <a:spcPts val="0"/>
-              </a:spcBef>
-              <a:spcAft>
-                <a:spcPts val="0"/>
-              </a:spcAft>
-            </a:pPr>
-            <a:r>
-              <a:rPr sz="1100" b="0">
-                <a:solidFill>
-                  <a:srgbClr val="5A636E"/>
-                </a:solidFill>
-                <a:latin typeface="Microsoft YaHei"/>
-                <a:ea typeface="Microsoft YaHei"/>
-                <a:cs typeface="Microsoft YaHei"/>
-              </a:rPr>
-              <a:t>post WR，收 CQ</a:t>
-            </a:r>
-          </a:p>
-        </p:txBody>
-      </p:sp>
-      <p:sp>
-        <p:nvSpPr>
-          <p:cNvPr id="52" name="Right Arrow 51"/>
-          <p:cNvSpPr/>
-          <p:nvPr/>
-        </p:nvSpPr>
-        <p:spPr>
-          <a:xfrm>
-            <a:off x="6565392" y="4334256"/>
-            <a:ext cx="365760" cy="182880"/>
-          </a:xfrm>
-          <a:prstGeom prst="rightArrow">
-            <a:avLst/>
-          </a:prstGeom>
-          <a:solidFill>
-            <a:srgbClr val="0E7A76"/>
-          </a:solidFill>
-          <a:ln>
-            <a:noFill/>
-          </a:ln>
-        </p:spPr>
-        <p:style>
-          <a:lnRef idx="1">
-            <a:schemeClr val="accent1"/>
-          </a:lnRef>
-          <a:fillRef idx="3">
-            <a:schemeClr val="accent1"/>
-          </a:fillRef>
-          <a:effectRef idx="2">
-            <a:schemeClr val="accent1"/>
-          </a:effectRef>
-          <a:fontRef idx="minor">
-            <a:schemeClr val="lt1"/>
-          </a:fontRef>
-        </p:style>
-        <p:txBody>
-          <a:bodyPr rtlCol="0" anchor="ctr"/>
-          <a:lstStyle/>
-          <a:p>
-            <a:pPr algn="ctr"/>
-          </a:p>
-        </p:txBody>
-      </p:sp>
-      <p:sp>
-        <p:nvSpPr>
-          <p:cNvPr id="53" name="TextBox 52"/>
-          <p:cNvSpPr txBox="1"/>
-          <p:nvPr/>
-        </p:nvSpPr>
-        <p:spPr>
-          <a:xfrm>
-            <a:off x="6309360" y="3803904"/>
-            <a:ext cx="877824" cy="256032"/>
-          </a:xfrm>
-          <a:prstGeom prst="rect">
-            <a:avLst/>
-          </a:prstGeom>
-          <a:noFill/>
-        </p:spPr>
-        <p:txBody>
-          <a:bodyPr wrap="square" lIns="0" rIns="0" tIns="0" bIns="0" anchor="ctr"/>
-          <a:lstStyle/>
-          <a:p>
-            <a:pPr algn="ctr">
-              <a:spcBef>
-                <a:spcPts val="0"/>
-              </a:spcBef>
-              <a:spcAft>
-                <a:spcPts val="0"/>
-              </a:spcAft>
-            </a:pPr>
-            <a:r>
-              <a:rPr sz="1000" b="1">
-                <a:solidFill>
-                  <a:srgbClr val="0E7A76"/>
-                </a:solidFill>
-                <a:latin typeface="Microsoft YaHei"/>
-                <a:ea typeface="Microsoft YaHei"/>
-                <a:cs typeface="Microsoft YaHei"/>
-              </a:rPr>
-              <a:t>数据 + rkey</a:t>
-            </a:r>
-          </a:p>
-        </p:txBody>
-      </p:sp>
-      <p:sp>
-        <p:nvSpPr>
-          <p:cNvPr id="54" name="Rounded Rectangle 53"/>
-          <p:cNvSpPr/>
-          <p:nvPr/>
-        </p:nvSpPr>
-        <p:spPr>
-          <a:xfrm>
-            <a:off x="6986016" y="4078224"/>
-            <a:ext cx="1700784" cy="713232"/>
-          </a:xfrm>
-          <a:prstGeom prst="roundRect">
-            <a:avLst/>
-          </a:prstGeom>
-          <a:solidFill>
-            <a:srgbClr val="E7F3F2"/>
-          </a:solidFill>
-          <a:ln w="12700">
-            <a:solidFill>
-              <a:srgbClr val="D6DCE2"/>
-            </a:solidFill>
-          </a:ln>
-        </p:spPr>
-        <p:style>
-          <a:lnRef idx="1">
-            <a:schemeClr val="accent1"/>
-          </a:lnRef>
-          <a:fillRef idx="3">
-            <a:schemeClr val="accent1"/>
-          </a:fillRef>
-          <a:effectRef idx="2">
-            <a:schemeClr val="accent1"/>
-          </a:effectRef>
-          <a:fontRef idx="minor">
-            <a:schemeClr val="lt1"/>
-          </a:fontRef>
-        </p:style>
-        <p:txBody>
-          <a:bodyPr rtlCol="0" anchor="ctr"/>
-          <a:lstStyle/>
-          <a:p>
-            <a:pPr algn="ctr"/>
-          </a:p>
-        </p:txBody>
-      </p:sp>
-      <p:sp>
-        <p:nvSpPr>
-          <p:cNvPr id="55" name="TextBox 54"/>
-          <p:cNvSpPr txBox="1"/>
-          <p:nvPr/>
-        </p:nvSpPr>
-        <p:spPr>
-          <a:xfrm>
-            <a:off x="7059168" y="4151376"/>
-            <a:ext cx="1554480" cy="292608"/>
-          </a:xfrm>
-          <a:prstGeom prst="rect">
-            <a:avLst/>
-          </a:prstGeom>
-          <a:noFill/>
-        </p:spPr>
-        <p:txBody>
-          <a:bodyPr wrap="square" lIns="0" rIns="0" tIns="0" bIns="0" anchor="ctr"/>
-          <a:lstStyle/>
-          <a:p>
-            <a:pPr algn="ctr">
-              <a:spcBef>
-                <a:spcPts val="0"/>
-              </a:spcBef>
-              <a:spcAft>
-                <a:spcPts val="0"/>
-              </a:spcAft>
-            </a:pPr>
-            <a:r>
-              <a:rPr sz="1400" b="1">
-                <a:solidFill>
-                  <a:srgbClr val="0E7A76"/>
-                </a:solidFill>
-                <a:latin typeface="Microsoft YaHei"/>
-                <a:ea typeface="Microsoft YaHei"/>
-                <a:cs typeface="Microsoft YaHei"/>
-              </a:rPr>
-              <a:t>对端网卡</a:t>
-            </a:r>
-          </a:p>
-        </p:txBody>
-      </p:sp>
-      <p:sp>
-        <p:nvSpPr>
-          <p:cNvPr id="56" name="TextBox 55"/>
-          <p:cNvSpPr txBox="1"/>
-          <p:nvPr/>
-        </p:nvSpPr>
-        <p:spPr>
-          <a:xfrm>
-            <a:off x="7059168" y="4443984"/>
-            <a:ext cx="1554480" cy="274320"/>
-          </a:xfrm>
-          <a:prstGeom prst="rect">
-            <a:avLst/>
-          </a:prstGeom>
-          <a:noFill/>
-        </p:spPr>
-        <p:txBody>
-          <a:bodyPr wrap="square" lIns="0" rIns="0" tIns="0" bIns="0" anchor="ctr"/>
-          <a:lstStyle/>
-          <a:p>
-            <a:pPr algn="ctr">
-              <a:spcBef>
-                <a:spcPts val="0"/>
-              </a:spcBef>
-              <a:spcAft>
-                <a:spcPts val="0"/>
-              </a:spcAft>
-            </a:pPr>
-            <a:r>
-              <a:rPr sz="1100" b="0">
-                <a:solidFill>
-                  <a:srgbClr val="5A636E"/>
-                </a:solidFill>
-                <a:latin typeface="Microsoft YaHei"/>
-                <a:ea typeface="Microsoft YaHei"/>
-                <a:cs typeface="Microsoft YaHei"/>
-              </a:rPr>
-              <a:t>只做 DMA</a:t>
-            </a:r>
-          </a:p>
-        </p:txBody>
-      </p:sp>
-      <p:sp>
-        <p:nvSpPr>
-          <p:cNvPr id="57" name="Right Arrow 56"/>
-          <p:cNvSpPr/>
-          <p:nvPr/>
-        </p:nvSpPr>
-        <p:spPr>
-          <a:xfrm>
-            <a:off x="8741664" y="4334256"/>
-            <a:ext cx="365760" cy="182880"/>
-          </a:xfrm>
-          <a:prstGeom prst="rightArrow">
-            <a:avLst/>
-          </a:prstGeom>
-          <a:solidFill>
-            <a:srgbClr val="0E7A76"/>
-          </a:solidFill>
-          <a:ln>
-            <a:noFill/>
-          </a:ln>
-        </p:spPr>
-        <p:style>
-          <a:lnRef idx="1">
-            <a:schemeClr val="accent1"/>
-          </a:lnRef>
-          <a:fillRef idx="3">
-            <a:schemeClr val="accent1"/>
-          </a:fillRef>
-          <a:effectRef idx="2">
-            <a:schemeClr val="accent1"/>
-          </a:effectRef>
-          <a:fontRef idx="minor">
-            <a:schemeClr val="lt1"/>
-          </a:fontRef>
-        </p:style>
-        <p:txBody>
-          <a:bodyPr rtlCol="0" anchor="ctr"/>
-          <a:lstStyle/>
-          <a:p>
-            <a:pPr algn="ctr"/>
-          </a:p>
-        </p:txBody>
-      </p:sp>
-      <p:sp>
-        <p:nvSpPr>
-          <p:cNvPr id="58" name="TextBox 57"/>
-          <p:cNvSpPr txBox="1"/>
-          <p:nvPr/>
-        </p:nvSpPr>
-        <p:spPr>
-          <a:xfrm>
-            <a:off x="8485632" y="3803904"/>
-            <a:ext cx="877824" cy="256032"/>
-          </a:xfrm>
-          <a:prstGeom prst="rect">
-            <a:avLst/>
-          </a:prstGeom>
-          <a:noFill/>
-        </p:spPr>
-        <p:txBody>
-          <a:bodyPr wrap="square" lIns="0" rIns="0" tIns="0" bIns="0" anchor="ctr"/>
-          <a:lstStyle/>
-          <a:p>
-            <a:pPr algn="ctr">
-              <a:spcBef>
-                <a:spcPts val="0"/>
-              </a:spcBef>
-              <a:spcAft>
-                <a:spcPts val="0"/>
-              </a:spcAft>
-            </a:pPr>
-            <a:r>
-              <a:rPr sz="1000" b="1">
-                <a:solidFill>
-                  <a:srgbClr val="0E7A76"/>
-                </a:solidFill>
-                <a:latin typeface="Microsoft YaHei"/>
-                <a:ea typeface="Microsoft YaHei"/>
-                <a:cs typeface="Microsoft YaHei"/>
-              </a:rPr>
-              <a:t>写入字节</a:t>
-            </a:r>
-          </a:p>
-        </p:txBody>
-      </p:sp>
-      <p:sp>
-        <p:nvSpPr>
-          <p:cNvPr id="59" name="Rounded Rectangle 58"/>
-          <p:cNvSpPr/>
-          <p:nvPr/>
-        </p:nvSpPr>
-        <p:spPr>
-          <a:xfrm>
-            <a:off x="9162288" y="4078224"/>
-            <a:ext cx="1700784" cy="713232"/>
-          </a:xfrm>
-          <a:prstGeom prst="roundRect">
-            <a:avLst/>
-          </a:prstGeom>
-          <a:solidFill>
-            <a:srgbClr val="E7F3F2"/>
-          </a:solidFill>
-          <a:ln w="12700">
-            <a:solidFill>
-              <a:srgbClr val="D6DCE2"/>
-            </a:solidFill>
-          </a:ln>
-        </p:spPr>
-        <p:style>
-          <a:lnRef idx="1">
-            <a:schemeClr val="accent1"/>
-          </a:lnRef>
-          <a:fillRef idx="3">
-            <a:schemeClr val="accent1"/>
-          </a:fillRef>
-          <a:effectRef idx="2">
-            <a:schemeClr val="accent1"/>
-          </a:effectRef>
-          <a:fontRef idx="minor">
-            <a:schemeClr val="lt1"/>
-          </a:fontRef>
-        </p:style>
-        <p:txBody>
-          <a:bodyPr rtlCol="0" anchor="ctr"/>
-          <a:lstStyle/>
-          <a:p>
-            <a:pPr algn="ctr"/>
-          </a:p>
-        </p:txBody>
-      </p:sp>
-      <p:sp>
-        <p:nvSpPr>
-          <p:cNvPr id="60" name="TextBox 59"/>
-          <p:cNvSpPr txBox="1"/>
-          <p:nvPr/>
-        </p:nvSpPr>
-        <p:spPr>
-          <a:xfrm>
-            <a:off x="9235440" y="4151376"/>
-            <a:ext cx="1554480" cy="292608"/>
-          </a:xfrm>
-          <a:prstGeom prst="rect">
-            <a:avLst/>
-          </a:prstGeom>
-          <a:noFill/>
-        </p:spPr>
-        <p:txBody>
-          <a:bodyPr wrap="square" lIns="0" rIns="0" tIns="0" bIns="0" anchor="ctr"/>
-          <a:lstStyle/>
-          <a:p>
-            <a:pPr algn="ctr">
-              <a:spcBef>
-                <a:spcPts val="0"/>
-              </a:spcBef>
-              <a:spcAft>
-                <a:spcPts val="0"/>
-              </a:spcAft>
-            </a:pPr>
-            <a:r>
-              <a:rPr sz="1400" b="1">
-                <a:solidFill>
-                  <a:srgbClr val="0E7A76"/>
-                </a:solidFill>
-                <a:latin typeface="Microsoft YaHei"/>
-                <a:ea typeface="Microsoft YaHei"/>
-                <a:cs typeface="Microsoft YaHei"/>
-              </a:rPr>
-              <a:t>对端内存</a:t>
-            </a:r>
-          </a:p>
-        </p:txBody>
-      </p:sp>
-      <p:sp>
-        <p:nvSpPr>
-          <p:cNvPr id="61" name="TextBox 60"/>
-          <p:cNvSpPr txBox="1"/>
-          <p:nvPr/>
-        </p:nvSpPr>
-        <p:spPr>
-          <a:xfrm>
-            <a:off x="9235440" y="4443984"/>
-            <a:ext cx="1554480" cy="274320"/>
-          </a:xfrm>
-          <a:prstGeom prst="rect">
-            <a:avLst/>
-          </a:prstGeom>
-          <a:noFill/>
-        </p:spPr>
-        <p:txBody>
-          <a:bodyPr wrap="square" lIns="0" rIns="0" tIns="0" bIns="0" anchor="ctr"/>
-          <a:lstStyle/>
-          <a:p>
-            <a:pPr algn="ctr">
-              <a:spcBef>
-                <a:spcPts val="0"/>
-              </a:spcBef>
-              <a:spcAft>
-                <a:spcPts val="0"/>
-              </a:spcAft>
-            </a:pPr>
-            <a:r>
-              <a:rPr sz="1100" b="0">
-                <a:solidFill>
-                  <a:srgbClr val="5A636E"/>
-                </a:solidFill>
-                <a:latin typeface="Microsoft YaHei"/>
-                <a:ea typeface="Microsoft YaHei"/>
-                <a:cs typeface="Microsoft YaHei"/>
-              </a:rPr>
-              <a:t>已注册的 DDR</a:t>
-            </a:r>
-          </a:p>
-        </p:txBody>
-      </p:sp>
-      <p:sp>
-        <p:nvSpPr>
-          <p:cNvPr id="62" name="Rounded Rectangle 61"/>
-          <p:cNvSpPr/>
-          <p:nvPr/>
-        </p:nvSpPr>
-        <p:spPr>
-          <a:xfrm>
-            <a:off x="384048" y="4864608"/>
-            <a:ext cx="11430000" cy="365760"/>
-          </a:xfrm>
-          <a:prstGeom prst="roundRect">
-            <a:avLst/>
-          </a:prstGeom>
-          <a:solidFill>
-            <a:srgbClr val="E7F3F2"/>
-          </a:solidFill>
-          <a:ln>
-            <a:noFill/>
-          </a:ln>
-        </p:spPr>
-        <p:style>
-          <a:lnRef idx="1">
-            <a:schemeClr val="accent1"/>
-          </a:lnRef>
-          <a:fillRef idx="3">
-            <a:schemeClr val="accent1"/>
-          </a:fillRef>
-          <a:effectRef idx="2">
-            <a:schemeClr val="accent1"/>
-          </a:effectRef>
-          <a:fontRef idx="minor">
-            <a:schemeClr val="lt1"/>
-          </a:fontRef>
-        </p:style>
-        <p:txBody>
-          <a:bodyPr rtlCol="0" anchor="ctr"/>
-          <a:lstStyle/>
-          <a:p>
-            <a:pPr algn="ctr"/>
-          </a:p>
-        </p:txBody>
-      </p:sp>
-      <p:sp>
-        <p:nvSpPr>
-          <p:cNvPr id="63" name="TextBox 62"/>
-          <p:cNvSpPr txBox="1"/>
-          <p:nvPr/>
-        </p:nvSpPr>
-        <p:spPr>
-          <a:xfrm>
-            <a:off x="512064" y="4864608"/>
-            <a:ext cx="11173968" cy="365760"/>
-          </a:xfrm>
-          <a:prstGeom prst="rect">
-            <a:avLst/>
-          </a:prstGeom>
-          <a:noFill/>
-        </p:spPr>
-        <p:txBody>
-          <a:bodyPr wrap="square" lIns="0" rIns="0" tIns="0" bIns="0" anchor="ctr"/>
+          <a:bodyPr wrap="square" lIns="0" rIns="0" tIns="0" bIns="0" anchor="t"/>
           <a:lstStyle/>
           <a:p>
             <a:pPr algn="l">
@@ -6152,21 +7693,449 @@
                 <a:ea typeface="Microsoft YaHei"/>
                 <a:cs typeface="Microsoft YaHei"/>
               </a:rPr>
-              <a:t>返回：对端网卡写完注册内存即结束。CQ 仍在本端，调用方得到 COMPLETED。对端没有软件响应。</a:t>
-            </a:r>
-          </a:p>
-        </p:txBody>
-      </p:sp>
-      <p:sp>
-        <p:nvSpPr>
-          <p:cNvPr id="64" name="Rounded Rectangle 63"/>
+              <a:t>本机做拷贝。远端 post RDMA WRITE。盘不在这次请求里。</a:t>
+            </a:r>
+          </a:p>
+        </p:txBody>
+      </p:sp>
+      <p:sp>
+        <p:nvSpPr>
+          <p:cNvPr id="46" name="Rounded Rectangle 45"/>
           <p:cNvSpPr/>
           <p:nvPr/>
         </p:nvSpPr>
         <p:spPr>
           <a:xfrm>
-            <a:off x="384048" y="5687568"/>
-            <a:ext cx="11430000" cy="749808"/>
+            <a:off x="6181344" y="4114800"/>
+            <a:ext cx="5632704" cy="768096"/>
+          </a:xfrm>
+          <a:prstGeom prst="roundRect">
+            <a:avLst/>
+          </a:prstGeom>
+          <a:solidFill>
+            <a:srgbClr val="F4F7FA"/>
+          </a:solidFill>
+          <a:ln w="12700">
+            <a:solidFill>
+              <a:srgbClr val="D6DCE2"/>
+            </a:solidFill>
+          </a:ln>
+        </p:spPr>
+        <p:style>
+          <a:lnRef idx="1">
+            <a:schemeClr val="accent1"/>
+          </a:lnRef>
+          <a:fillRef idx="3">
+            <a:schemeClr val="accent1"/>
+          </a:fillRef>
+          <a:effectRef idx="2">
+            <a:schemeClr val="accent1"/>
+          </a:effectRef>
+          <a:fontRef idx="minor">
+            <a:schemeClr val="lt1"/>
+          </a:fontRef>
+        </p:style>
+        <p:txBody>
+          <a:bodyPr rtlCol="0" anchor="ctr"/>
+          <a:lstStyle/>
+          <a:p>
+            <a:pPr algn="ctr"/>
+          </a:p>
+        </p:txBody>
+      </p:sp>
+      <p:sp>
+        <p:nvSpPr>
+          <p:cNvPr id="47" name="Rectangle 46"/>
+          <p:cNvSpPr/>
+          <p:nvPr/>
+        </p:nvSpPr>
+        <p:spPr>
+          <a:xfrm>
+            <a:off x="6181344" y="4206240"/>
+            <a:ext cx="64008" cy="585215"/>
+          </a:xfrm>
+          <a:prstGeom prst="rect">
+            <a:avLst/>
+          </a:prstGeom>
+          <a:solidFill>
+            <a:srgbClr val="0E2A47"/>
+          </a:solidFill>
+          <a:ln>
+            <a:noFill/>
+          </a:ln>
+        </p:spPr>
+        <p:style>
+          <a:lnRef idx="1">
+            <a:schemeClr val="accent1"/>
+          </a:lnRef>
+          <a:fillRef idx="3">
+            <a:schemeClr val="accent1"/>
+          </a:fillRef>
+          <a:effectRef idx="2">
+            <a:schemeClr val="accent1"/>
+          </a:effectRef>
+          <a:fontRef idx="minor">
+            <a:schemeClr val="lt1"/>
+          </a:fontRef>
+        </p:style>
+        <p:txBody>
+          <a:bodyPr rtlCol="0" anchor="ctr"/>
+          <a:lstStyle/>
+          <a:p>
+            <a:pPr algn="ctr"/>
+          </a:p>
+        </p:txBody>
+      </p:sp>
+      <p:sp>
+        <p:nvSpPr>
+          <p:cNvPr id="48" name="TextBox 47"/>
+          <p:cNvSpPr txBox="1"/>
+          <p:nvPr/>
+        </p:nvSpPr>
+        <p:spPr>
+          <a:xfrm>
+            <a:off x="6345936" y="4169663"/>
+            <a:ext cx="566928" cy="237744"/>
+          </a:xfrm>
+          <a:prstGeom prst="rect">
+            <a:avLst/>
+          </a:prstGeom>
+          <a:noFill/>
+        </p:spPr>
+        <p:txBody>
+          <a:bodyPr wrap="square" lIns="0" rIns="0" tIns="0" bIns="0" anchor="ctr"/>
+          <a:lstStyle/>
+          <a:p>
+            <a:pPr algn="l">
+              <a:spcBef>
+                <a:spcPts val="0"/>
+              </a:spcBef>
+              <a:spcAft>
+                <a:spcPts val="0"/>
+              </a:spcAft>
+            </a:pPr>
+            <a:r>
+              <a:rPr sz="1200" b="1">
+                <a:solidFill>
+                  <a:srgbClr val="0E2A47"/>
+                </a:solidFill>
+                <a:latin typeface="Microsoft YaHei"/>
+                <a:ea typeface="Microsoft YaHei"/>
+                <a:cs typeface="Microsoft YaHei"/>
+              </a:rPr>
+              <a:t>控制</a:t>
+            </a:r>
+          </a:p>
+        </p:txBody>
+      </p:sp>
+      <p:sp>
+        <p:nvSpPr>
+          <p:cNvPr id="49" name="TextBox 48"/>
+          <p:cNvSpPr txBox="1"/>
+          <p:nvPr/>
+        </p:nvSpPr>
+        <p:spPr>
+          <a:xfrm>
+            <a:off x="6931152" y="4160520"/>
+            <a:ext cx="4754880" cy="256032"/>
+          </a:xfrm>
+          <a:prstGeom prst="rect">
+            <a:avLst/>
+          </a:prstGeom>
+          <a:noFill/>
+        </p:spPr>
+        <p:txBody>
+          <a:bodyPr wrap="square" lIns="0" rIns="0" tIns="0" bIns="0" anchor="ctr"/>
+          <a:lstStyle/>
+          <a:p>
+            <a:pPr algn="l">
+              <a:spcBef>
+                <a:spcPts val="0"/>
+              </a:spcBef>
+              <a:spcAft>
+                <a:spcPts val="0"/>
+              </a:spcAft>
+            </a:pPr>
+            <a:r>
+              <a:rPr sz="1300" b="1">
+                <a:solidFill>
+                  <a:srgbClr val="1C242E"/>
+                </a:solidFill>
+                <a:latin typeface="Microsoft YaHei"/>
+                <a:ea typeface="Microsoft YaHei"/>
+                <a:cs typeface="Microsoft YaHei"/>
+              </a:rPr>
+              <a:t>Decode  →  Master</a:t>
+            </a:r>
+          </a:p>
+        </p:txBody>
+      </p:sp>
+      <p:sp>
+        <p:nvSpPr>
+          <p:cNvPr id="50" name="TextBox 49"/>
+          <p:cNvSpPr txBox="1"/>
+          <p:nvPr/>
+        </p:nvSpPr>
+        <p:spPr>
+          <a:xfrm>
+            <a:off x="6345936" y="4443984"/>
+            <a:ext cx="5340096" cy="384048"/>
+          </a:xfrm>
+          <a:prstGeom prst="rect">
+            <a:avLst/>
+          </a:prstGeom>
+          <a:noFill/>
+        </p:spPr>
+        <p:txBody>
+          <a:bodyPr wrap="square" lIns="0" rIns="0" tIns="0" bIns="0" anchor="t"/>
+          <a:lstStyle/>
+          <a:p>
+            <a:pPr algn="l">
+              <a:spcBef>
+                <a:spcPts val="0"/>
+              </a:spcBef>
+              <a:spcAft>
+                <a:spcPts val="0"/>
+              </a:spcAft>
+            </a:pPr>
+            <a:r>
+              <a:rPr sz="1200" b="0">
+                <a:solidFill>
+                  <a:srgbClr val="1C242E"/>
+                </a:solidFill>
+                <a:latin typeface="Microsoft YaHei"/>
+                <a:ea typeface="Microsoft YaHei"/>
+                <a:cs typeface="Microsoft YaHei"/>
+              </a:rPr>
+              <a:t>PutEnd。副本变为 COMPLETE，其他 Decode 的 GetReplicaList 才能读到。</a:t>
+            </a:r>
+          </a:p>
+        </p:txBody>
+      </p:sp>
+      <p:sp>
+        <p:nvSpPr>
+          <p:cNvPr id="51" name="Rounded Rectangle 50"/>
+          <p:cNvSpPr/>
+          <p:nvPr/>
+        </p:nvSpPr>
+        <p:spPr>
+          <a:xfrm>
+            <a:off x="6181344" y="4937760"/>
+            <a:ext cx="5632704" cy="768096"/>
+          </a:xfrm>
+          <a:prstGeom prst="roundRect">
+            <a:avLst/>
+          </a:prstGeom>
+          <a:solidFill>
+            <a:srgbClr val="F4F7FA"/>
+          </a:solidFill>
+          <a:ln w="12700">
+            <a:solidFill>
+              <a:srgbClr val="D6DCE2"/>
+            </a:solidFill>
+          </a:ln>
+        </p:spPr>
+        <p:style>
+          <a:lnRef idx="1">
+            <a:schemeClr val="accent1"/>
+          </a:lnRef>
+          <a:fillRef idx="3">
+            <a:schemeClr val="accent1"/>
+          </a:fillRef>
+          <a:effectRef idx="2">
+            <a:schemeClr val="accent1"/>
+          </a:effectRef>
+          <a:fontRef idx="minor">
+            <a:schemeClr val="lt1"/>
+          </a:fontRef>
+        </p:style>
+        <p:txBody>
+          <a:bodyPr rtlCol="0" anchor="ctr"/>
+          <a:lstStyle/>
+          <a:p>
+            <a:pPr algn="ctr"/>
+          </a:p>
+        </p:txBody>
+      </p:sp>
+      <p:sp>
+        <p:nvSpPr>
+          <p:cNvPr id="52" name="Rectangle 51"/>
+          <p:cNvSpPr/>
+          <p:nvPr/>
+        </p:nvSpPr>
+        <p:spPr>
+          <a:xfrm>
+            <a:off x="6181344" y="5029200"/>
+            <a:ext cx="64008" cy="585215"/>
+          </a:xfrm>
+          <a:prstGeom prst="rect">
+            <a:avLst/>
+          </a:prstGeom>
+          <a:solidFill>
+            <a:srgbClr val="0E2A47"/>
+          </a:solidFill>
+          <a:ln>
+            <a:noFill/>
+          </a:ln>
+        </p:spPr>
+        <p:style>
+          <a:lnRef idx="1">
+            <a:schemeClr val="accent1"/>
+          </a:lnRef>
+          <a:fillRef idx="3">
+            <a:schemeClr val="accent1"/>
+          </a:fillRef>
+          <a:effectRef idx="2">
+            <a:schemeClr val="accent1"/>
+          </a:effectRef>
+          <a:fontRef idx="minor">
+            <a:schemeClr val="lt1"/>
+          </a:fontRef>
+        </p:style>
+        <p:txBody>
+          <a:bodyPr rtlCol="0" anchor="ctr"/>
+          <a:lstStyle/>
+          <a:p>
+            <a:pPr algn="ctr"/>
+          </a:p>
+        </p:txBody>
+      </p:sp>
+      <p:sp>
+        <p:nvSpPr>
+          <p:cNvPr id="53" name="TextBox 52"/>
+          <p:cNvSpPr txBox="1"/>
+          <p:nvPr/>
+        </p:nvSpPr>
+        <p:spPr>
+          <a:xfrm>
+            <a:off x="6345936" y="4992624"/>
+            <a:ext cx="566928" cy="237744"/>
+          </a:xfrm>
+          <a:prstGeom prst="rect">
+            <a:avLst/>
+          </a:prstGeom>
+          <a:noFill/>
+        </p:spPr>
+        <p:txBody>
+          <a:bodyPr wrap="square" lIns="0" rIns="0" tIns="0" bIns="0" anchor="ctr"/>
+          <a:lstStyle/>
+          <a:p>
+            <a:pPr algn="l">
+              <a:spcBef>
+                <a:spcPts val="0"/>
+              </a:spcBef>
+              <a:spcAft>
+                <a:spcPts val="0"/>
+              </a:spcAft>
+            </a:pPr>
+            <a:r>
+              <a:rPr sz="1200" b="1">
+                <a:solidFill>
+                  <a:srgbClr val="0E2A47"/>
+                </a:solidFill>
+                <a:latin typeface="Microsoft YaHei"/>
+                <a:ea typeface="Microsoft YaHei"/>
+                <a:cs typeface="Microsoft YaHei"/>
+              </a:rPr>
+              <a:t>控制</a:t>
+            </a:r>
+          </a:p>
+        </p:txBody>
+      </p:sp>
+      <p:sp>
+        <p:nvSpPr>
+          <p:cNvPr id="54" name="TextBox 53"/>
+          <p:cNvSpPr txBox="1"/>
+          <p:nvPr/>
+        </p:nvSpPr>
+        <p:spPr>
+          <a:xfrm>
+            <a:off x="6931152" y="4983480"/>
+            <a:ext cx="4754880" cy="256032"/>
+          </a:xfrm>
+          <a:prstGeom prst="rect">
+            <a:avLst/>
+          </a:prstGeom>
+          <a:noFill/>
+        </p:spPr>
+        <p:txBody>
+          <a:bodyPr wrap="square" lIns="0" rIns="0" tIns="0" bIns="0" anchor="ctr"/>
+          <a:lstStyle/>
+          <a:p>
+            <a:pPr algn="l">
+              <a:spcBef>
+                <a:spcPts val="0"/>
+              </a:spcBef>
+              <a:spcAft>
+                <a:spcPts val="0"/>
+              </a:spcAft>
+            </a:pPr>
+            <a:r>
+              <a:rPr sz="1300" b="1">
+                <a:solidFill>
+                  <a:srgbClr val="1C242E"/>
+                </a:solidFill>
+                <a:latin typeface="Microsoft YaHei"/>
+                <a:ea typeface="Microsoft YaHei"/>
+                <a:cs typeface="Microsoft YaHei"/>
+              </a:rPr>
+              <a:t>Master  →  持有副本的客户端</a:t>
+            </a:r>
+          </a:p>
+        </p:txBody>
+      </p:sp>
+      <p:sp>
+        <p:nvSpPr>
+          <p:cNvPr id="55" name="TextBox 54"/>
+          <p:cNvSpPr txBox="1"/>
+          <p:nvPr/>
+        </p:nvSpPr>
+        <p:spPr>
+          <a:xfrm>
+            <a:off x="6345936" y="5266944"/>
+            <a:ext cx="5340096" cy="384048"/>
+          </a:xfrm>
+          <a:prstGeom prst="rect">
+            <a:avLst/>
+          </a:prstGeom>
+          <a:noFill/>
+        </p:spPr>
+        <p:txBody>
+          <a:bodyPr wrap="square" lIns="0" rIns="0" tIns="0" bIns="0" anchor="t"/>
+          <a:lstStyle/>
+          <a:p>
+            <a:pPr algn="l">
+              <a:spcBef>
+                <a:spcPts val="0"/>
+              </a:spcBef>
+              <a:spcAft>
+                <a:spcPts val="0"/>
+              </a:spcAft>
+            </a:pPr>
+            <a:r>
+              <a:rPr sz="1200" b="0">
+                <a:solidFill>
+                  <a:srgbClr val="1C242E"/>
+                </a:solidFill>
+                <a:latin typeface="Microsoft YaHei"/>
+                <a:ea typeface="Microsoft YaHei"/>
+                <a:cs typeface="Microsoft YaHei"/>
+              </a:rPr>
+              <a:t>PutEnd 之后或淘汰时，客户端把对象写入本地 SSD，副本改为 LOCAL_DISK。</a:t>
+            </a:r>
+          </a:p>
+        </p:txBody>
+      </p:sp>
+      <p:sp>
+        <p:nvSpPr>
+          <p:cNvPr id="56" name="Rounded Rectangle 55"/>
+          <p:cNvSpPr/>
+          <p:nvPr/>
+        </p:nvSpPr>
+        <p:spPr>
+          <a:xfrm>
+            <a:off x="384048" y="5870448"/>
+            <a:ext cx="11430000" cy="603504"/>
           </a:xfrm>
           <a:prstGeom prst="roundRect">
             <a:avLst/>
@@ -6202,14 +8171,14 @@
       </p:sp>
       <p:sp>
         <p:nvSpPr>
-          <p:cNvPr id="65" name="TextBox 64"/>
+          <p:cNvPr id="57" name="TextBox 56"/>
           <p:cNvSpPr txBox="1"/>
           <p:nvPr/>
         </p:nvSpPr>
         <p:spPr>
           <a:xfrm>
-            <a:off x="530352" y="5742432"/>
-            <a:ext cx="11137392" cy="640080"/>
+            <a:off x="512064" y="5870448"/>
+            <a:ext cx="11173968" cy="603504"/>
           </a:xfrm>
           <a:prstGeom prst="rect">
             <a:avLst/>
@@ -6229,7 +8198,7 @@
               </a:spcAft>
             </a:pPr>
             <a:r>
-              <a:rPr sz="1400" b="0">
+              <a:rPr sz="1300" b="0">
                 <a:solidFill>
                   <a:srgbClr val="7A541C"/>
                 </a:solidFill>
@@ -6237,7 +8206,7 @@
                 <a:ea typeface="Microsoft YaHei"/>
                 <a:cs typeface="Microsoft YaHei"/>
               </a:rPr>
-              <a:t>控速点在本端引擎，post WR 之前。target_rate 加在 TransferRequest 上，只有这一侧读得到。</a:t>
+              <a:t>写到哪里在控制面定完。TransferRequest 只剩 opcode、本地地址、segment、offset、length。</a:t>
             </a:r>
           </a:p>
           <a:p>
@@ -6250,7 +8219,7 @@
               </a:spcAft>
             </a:pPr>
             <a:r>
-              <a:rPr sz="1400" b="0">
+              <a:rPr sz="1300" b="0">
                 <a:solidFill>
                   <a:srgbClr val="7A541C"/>
                 </a:solidFill>
@@ -6258,7 +8227,7 @@
                 <a:ea typeface="Microsoft YaHei"/>
                 <a:cs typeface="Microsoft YaHei"/>
               </a:rPr>
-              <a:t>READ 的速率是本端拉取的速度，WRITE 的速率是本端推送的速度。对端网卡按 rkey 搬运，不解析这个字段。</a:t>
+              <a:t>远端 DDR 是访存语义。SSD 要等卸载控制把对象装进暂存，才再次变成 RDMA READ。</a:t>
             </a:r>
           </a:p>
         </p:txBody>
